--- a/nop/02-slide-bao-ve.pptx
+++ b/nop/02-slide-bao-ve.pptx
@@ -33,27 +33,23 @@
     <p:sldId id="281" r:id="rId30"/>
     <p:sldId id="282" r:id="rId31"/>
     <p:sldId id="283" r:id="rId32"/>
-    <p:sldId id="284" r:id="rId33"/>
-    <p:sldId id="285" r:id="rId34"/>
-    <p:sldId id="286" r:id="rId35"/>
-    <p:sldId id="287" r:id="rId36"/>
   </p:sldIdLst>
   <p:sldSz cx="12192000" cy="6858000"/>
   <p:notesSz cx="6858000" cy="9144000"/>
   <p:embeddedFontLst>
     <p:embeddedFont>
       <p:font typeface="Roboto"/>
+      <p:regular r:id="rId33"/>
+      <p:bold r:id="rId34"/>
+      <p:italic r:id="rId35"/>
+      <p:boldItalic r:id="rId36"/>
+    </p:embeddedFont>
+    <p:embeddedFont>
+      <p:font typeface="Open Sans"/>
       <p:regular r:id="rId37"/>
       <p:bold r:id="rId38"/>
       <p:italic r:id="rId39"/>
       <p:boldItalic r:id="rId40"/>
-    </p:embeddedFont>
-    <p:embeddedFont>
-      <p:font typeface="Open Sans"/>
-      <p:regular r:id="rId41"/>
-      <p:bold r:id="rId42"/>
-      <p:italic r:id="rId43"/>
-      <p:boldItalic r:id="rId44"/>
     </p:embeddedFont>
   </p:embeddedFontLst>
   <p:defaultTextStyle>
@@ -287,7 +283,7 @@
   </p:defaultTextStyle>
   <p:extLst>
     <p:ext uri="GoogleSlidesCustomDataVersion2">
-      <go:slidesCustomData xmlns:go="http://customooxmlschemas.google.com/" roundtripDataSignature="AMtx7mhu5dURU4INwSlvEO7StWDXKr50jg==" r:id="rId45"/>
+      <go:slidesCustomData xmlns:go="http://customooxmlschemas.google.com/" roundtripDataSignature="AMtx7mhu5dURU4INwSlvEO7StWDXKr50jg==" r:id="rId41"/>
     </p:ext>
   </p:extLst>
 </p:presentation>
@@ -50959,1171 +50955,7 @@
             </a:pPr>
             <a:r>
               <a:rPr/>
-              <a:t>Backup 1 — Kiến trúc mô hình YOLO11</a:t>
-            </a:r>
-          </a:p>
-        </p:txBody>
-      </p:sp>
-      <p:sp>
-        <p:nvSpPr>
-          <p:cNvPr id="437" name="Google Shape;437;p31"/>
-          <p:cNvSpPr txBox="1"/>
-          <p:nvPr>
-            <p:ph idx="2" sz="half" type="body"/>
-          </p:nvPr>
-        </p:nvSpPr>
-        <p:spPr/>
-        <p:txBody>
-          <a:bodyPr/>
-          <a:lstStyle/>
-          <a:p>
-            <a:pPr lvl="0" indent="0" marL="0">
-              <a:buNone/>
-            </a:pPr>
-            <a:r>
-              <a:rPr/>
-              <a:t>Cải tiến mạng trích xuất đặc trưng &amp; head phát hiện đa tỉ lệ </a:t>
-            </a:r>
-            <a:r>
-              <a:rPr i="1"/>
-              <a:t>(Ultralytics 2024)</a:t>
-            </a:r>
-          </a:p>
-        </p:txBody>
-      </p:sp>
-      <p:graphicFrame>
-        <p:nvGraphicFramePr>
-          <p:cNvPr id="6" name="Content Placeholder 5"/>
-          <p:cNvGraphicFramePr>
-            <a:graphicFrameLocks noGrp="1"/>
-          </p:cNvGraphicFramePr>
-          <p:nvPr>
-            <p:ph idx="1"/>
-          </p:nvPr>
-        </p:nvGraphicFramePr>
-        <p:xfrm>
-          <a:off x="762000" y="2324100"/>
-          <a:ext cx="10579100" cy="3848100"/>
-        </p:xfrm>
-        <a:graphic>
-          <a:graphicData uri="http://schemas.openxmlformats.org/drawingml/2006/table">
-            <a:tbl>
-              <a:tblPr firstRow="1" bandRow="1">
-                <a:tableStyleId>{45BEF19B-5B1D-4A26-B267-ECC71EF7E2D4}</a:tableStyleId>
-              </a:tblPr>
-              <a:tblGrid>
-                <a:gridCol w="3517900"/>
-                <a:gridCol w="3517900"/>
-                <a:gridCol w="3517900"/>
-              </a:tblGrid>
-              <a:tr h="0">
-                <a:tc>
-                  <a:txBody>
-                    <a:bodyPr/>
-                    <a:lstStyle/>
-                    <a:p>
-                      <a:pPr lvl="0" indent="0" marL="0">
-                        <a:buNone/>
-                      </a:pPr>
-                      <a:r>
-                        <a:rPr/>
-                        <a:t>Thành phần</a:t>
-                      </a:r>
-                    </a:p>
-                  </a:txBody>
-                  <a:tcPr/>
-                </a:tc>
-                <a:tc>
-                  <a:txBody>
-                    <a:bodyPr/>
-                    <a:lstStyle/>
-                    <a:p>
-                      <a:pPr lvl="0" indent="0" marL="0">
-                        <a:buNone/>
-                      </a:pPr>
-                      <a:r>
-                        <a:rPr/>
-                        <a:t>Chi tiết kỹ thuật</a:t>
-                      </a:r>
-                    </a:p>
-                  </a:txBody>
-                  <a:tcPr/>
-                </a:tc>
-                <a:tc>
-                  <a:txBody>
-                    <a:bodyPr/>
-                    <a:lstStyle/>
-                    <a:p>
-                      <a:pPr lvl="0" indent="0" marL="0">
-                        <a:buNone/>
-                      </a:pPr>
-                      <a:r>
-                        <a:rPr/>
-                        <a:t>Vai trò trong hệ thống ALPR</a:t>
-                      </a:r>
-                    </a:p>
-                  </a:txBody>
-                  <a:tcPr/>
-                </a:tc>
-              </a:tr>
-              <a:tr h="0">
-                <a:tc>
-                  <a:txBody>
-                    <a:bodyPr/>
-                    <a:lstStyle/>
-                    <a:p>
-                      <a:pPr lvl="0" indent="0" marL="0">
-                        <a:buNone/>
-                      </a:pPr>
-                      <a:r>
-                        <a:rPr b="1"/>
-                        <a:t>Backbone</a:t>
-                      </a:r>
-                    </a:p>
-                  </a:txBody>
-                </a:tc>
-                <a:tc>
-                  <a:txBody>
-                    <a:bodyPr/>
-                    <a:lstStyle/>
-                    <a:p>
-                      <a:pPr lvl="0" indent="0" marL="0">
-                        <a:buNone/>
-                      </a:pPr>
-                      <a:r>
-                        <a:rPr/>
-                        <a:t>Block </a:t>
-                      </a:r>
-                      <a:r>
-                        <a:rPr b="1"/>
-                        <a:t>C3k2</a:t>
-                      </a:r>
-                      <a:r>
-                        <a:rPr/>
-                        <a:t> &amp; </a:t>
-                      </a:r>
-                      <a:r>
-                        <a:rPr b="1"/>
-                        <a:t>C2PSA</a:t>
-                      </a:r>
-                      <a:r>
-                        <a:rPr/>
-                        <a:t> </a:t>
-                      </a:r>
-                      <a:r>
-                        <a:rPr i="1"/>
-                        <a:t>(Attention)</a:t>
-                      </a:r>
-                    </a:p>
-                  </a:txBody>
-                </a:tc>
-                <a:tc>
-                  <a:txBody>
-                    <a:bodyPr/>
-                    <a:lstStyle/>
-                    <a:p>
-                      <a:pPr lvl="0" indent="0" marL="0">
-                        <a:buNone/>
-                      </a:pPr>
-                      <a:r>
-                        <a:rPr/>
-                        <a:t>Trích xuất đặc trưng vùng biển số sắc nét ở nhiều góc nghiêng</a:t>
-                      </a:r>
-                    </a:p>
-                  </a:txBody>
-                </a:tc>
-              </a:tr>
-              <a:tr h="0">
-                <a:tc>
-                  <a:txBody>
-                    <a:bodyPr/>
-                    <a:lstStyle/>
-                    <a:p>
-                      <a:pPr lvl="0" indent="0" marL="0">
-                        <a:buNone/>
-                      </a:pPr>
-                      <a:r>
-                        <a:rPr b="1"/>
-                        <a:t>Neck</a:t>
-                      </a:r>
-                    </a:p>
-                  </a:txBody>
-                </a:tc>
-                <a:tc>
-                  <a:txBody>
-                    <a:bodyPr/>
-                    <a:lstStyle/>
-                    <a:p>
-                      <a:pPr lvl="0" indent="0" marL="0">
-                        <a:buNone/>
-                      </a:pPr>
-                      <a:r>
-                        <a:rPr b="1"/>
-                        <a:t>SPPF</a:t>
-                      </a:r>
-                      <a:r>
-                        <a:rPr/>
-                        <a:t> </a:t>
-                      </a:r>
-                      <a:r>
-                        <a:rPr i="1"/>
-                        <a:t>(Spatial Pyramid Pooling - Fast)</a:t>
-                      </a:r>
-                    </a:p>
-                  </a:txBody>
-                </a:tc>
-                <a:tc>
-                  <a:txBody>
-                    <a:bodyPr/>
-                    <a:lstStyle/>
-                    <a:p>
-                      <a:pPr lvl="0" indent="0" marL="0">
-                        <a:buNone/>
-                      </a:pPr>
-                      <a:r>
-                        <a:rPr/>
-                        <a:t>Tăng cường thông tin ngữ cảnh đa tỉ lệ mà không tăng độ trễ</a:t>
-                      </a:r>
-                    </a:p>
-                  </a:txBody>
-                </a:tc>
-              </a:tr>
-              <a:tr h="0">
-                <a:tc>
-                  <a:txBody>
-                    <a:bodyPr/>
-                    <a:lstStyle/>
-                    <a:p>
-                      <a:pPr lvl="0" indent="0" marL="0">
-                        <a:buNone/>
-                      </a:pPr>
-                      <a:r>
-                        <a:rPr b="1"/>
-                        <a:t>Head</a:t>
-                      </a:r>
-                    </a:p>
-                  </a:txBody>
-                </a:tc>
-                <a:tc>
-                  <a:txBody>
-                    <a:bodyPr/>
-                    <a:lstStyle/>
-                    <a:p>
-                      <a:pPr lvl="0" indent="0" marL="0">
-                        <a:buNone/>
-                      </a:pPr>
-                      <a:r>
-                        <a:rPr/>
-                        <a:t>Anchor-free Decoupled Head</a:t>
-                      </a:r>
-                    </a:p>
-                  </a:txBody>
-                </a:tc>
-                <a:tc>
-                  <a:txBody>
-                    <a:bodyPr/>
-                    <a:lstStyle/>
-                    <a:p>
-                      <a:pPr lvl="0" indent="0" marL="0">
-                        <a:buNone/>
-                      </a:pPr>
-                      <a:r>
-                        <a:rPr/>
-                        <a:t>Dự đoán bounding box của lớp </a:t>
-                      </a:r>
-                      <a:r>
-                        <a:rPr>
-                          <a:latin typeface="Courier"/>
-                        </a:rPr>
-                        <a:t>license_plate</a:t>
-                      </a:r>
-                      <a:r>
-                        <a:rPr/>
-                        <a:t>; bố cục một/hai dòng được suy ra ở bước hậu xử lý theo tỷ lệ khung hình</a:t>
-                      </a:r>
-                    </a:p>
-                  </a:txBody>
-                </a:tc>
-              </a:tr>
-              <a:tr h="0">
-                <a:tc>
-                  <a:txBody>
-                    <a:bodyPr/>
-                    <a:lstStyle/>
-                    <a:p>
-                      <a:pPr lvl="0" indent="0" marL="0">
-                        <a:buNone/>
-                      </a:pPr>
-                      <a:r>
-                        <a:rPr b="1"/>
-                        <a:t>Quy mô</a:t>
-                      </a:r>
-                    </a:p>
-                  </a:txBody>
-                </a:tc>
-                <a:tc>
-                  <a:txBody>
-                    <a:bodyPr/>
-                    <a:lstStyle/>
-                    <a:p>
-                      <a:pPr lvl="0" indent="0" marL="0">
-                        <a:buNone/>
-                      </a:pPr>
-                      <a:r>
-                        <a:rPr b="1"/>
-                        <a:t>YOLO11n</a:t>
-                      </a:r>
-                      <a:r>
-                        <a:rPr/>
-                        <a:t> · </a:t>
-                      </a:r>
-                      <a:r>
-                        <a:rPr b="1"/>
-                        <a:t>2,6M params</a:t>
-                      </a:r>
-                      <a:r>
-                        <a:rPr/>
-                        <a:t> · </a:t>
-                      </a:r>
-                      <a:r>
-                        <a:rPr b="1"/>
-                        <a:t>6,5 GFLOPs</a:t>
-                      </a:r>
-                    </a:p>
-                  </a:txBody>
-                </a:tc>
-                <a:tc>
-                  <a:txBody>
-                    <a:bodyPr/>
-                    <a:lstStyle/>
-                    <a:p>
-                      <a:pPr lvl="0" indent="0" marL="0">
-                        <a:buNone/>
-                      </a:pPr>
-                      <a:r>
-                        <a:rPr/>
-                        <a:t>Đạt </a:t>
-                      </a:r>
-                      <a:r>
-                        <a:rPr b="1"/>
-                        <a:t>mAP50 0,983</a:t>
-                      </a:r>
-                      <a:r>
-                        <a:rPr/>
-                        <a:t> trên CPU với tốc độ ~35 ms/khung hình</a:t>
-                      </a:r>
-                    </a:p>
-                  </a:txBody>
-                </a:tc>
-              </a:tr>
-            </a:tbl>
-          </a:graphicData>
-        </a:graphic>
-      </p:graphicFrame>
-      <p:sp>
-        <p:nvSpPr>
-          <p:cNvPr id="449" name="Google Shape;449;p31"/>
-          <p:cNvSpPr txBox="1"/>
-          <p:nvPr>
-            <p:ph idx="12" type="sldNum"/>
-          </p:nvPr>
-        </p:nvSpPr>
-        <p:spPr>
-          <a:xfrm>
-            <a:off x="58380" y="6508358"/>
-            <a:ext cx="349642" cy="349642"/>
-          </a:xfrm>
-          <a:prstGeom prst="rect">
-            <a:avLst/>
-          </a:prstGeom>
-          <a:noFill/>
-          <a:ln>
-            <a:noFill/>
-          </a:ln>
-        </p:spPr>
-        <p:txBody>
-          <a:bodyPr anchor="ctr" anchorCtr="0" bIns="45700" lIns="91425" rIns="91425" spcFirstLastPara="1" tIns="45700" wrap="square">
-            <a:noAutofit/>
-          </a:bodyPr>
-          <a:lstStyle>
-            <a:lvl1pPr algn="ctr" indent="0" lvl="0" marL="0">
-              <a:spcBef>
-                <a:spcPts val="0"/>
-              </a:spcBef>
-              <a:buNone/>
-              <a:defRPr sz="700">
-                <a:solidFill>
-                  <a:schemeClr val="dk1"/>
-                </a:solidFill>
-                <a:latin typeface="Arial"/>
-                <a:ea typeface="Arial"/>
-                <a:cs typeface="Arial"/>
-                <a:sym typeface="Arial"/>
-              </a:defRPr>
-            </a:lvl1pPr>
-            <a:lvl2pPr algn="ctr" indent="0" lvl="1" marL="0">
-              <a:spcBef>
-                <a:spcPts val="0"/>
-              </a:spcBef>
-              <a:buNone/>
-              <a:defRPr sz="700">
-                <a:solidFill>
-                  <a:schemeClr val="dk1"/>
-                </a:solidFill>
-                <a:latin typeface="Arial"/>
-                <a:ea typeface="Arial"/>
-                <a:cs typeface="Arial"/>
-                <a:sym typeface="Arial"/>
-              </a:defRPr>
-            </a:lvl2pPr>
-            <a:lvl3pPr algn="ctr" indent="0" lvl="2" marL="0">
-              <a:spcBef>
-                <a:spcPts val="0"/>
-              </a:spcBef>
-              <a:buNone/>
-              <a:defRPr sz="700">
-                <a:solidFill>
-                  <a:schemeClr val="dk1"/>
-                </a:solidFill>
-                <a:latin typeface="Arial"/>
-                <a:ea typeface="Arial"/>
-                <a:cs typeface="Arial"/>
-                <a:sym typeface="Arial"/>
-              </a:defRPr>
-            </a:lvl3pPr>
-            <a:lvl4pPr algn="ctr" indent="0" lvl="3" marL="0">
-              <a:spcBef>
-                <a:spcPts val="0"/>
-              </a:spcBef>
-              <a:buNone/>
-              <a:defRPr sz="700">
-                <a:solidFill>
-                  <a:schemeClr val="dk1"/>
-                </a:solidFill>
-                <a:latin typeface="Arial"/>
-                <a:ea typeface="Arial"/>
-                <a:cs typeface="Arial"/>
-                <a:sym typeface="Arial"/>
-              </a:defRPr>
-            </a:lvl4pPr>
-            <a:lvl5pPr algn="ctr" indent="0" lvl="4" marL="0">
-              <a:spcBef>
-                <a:spcPts val="0"/>
-              </a:spcBef>
-              <a:buNone/>
-              <a:defRPr sz="700">
-                <a:solidFill>
-                  <a:schemeClr val="dk1"/>
-                </a:solidFill>
-                <a:latin typeface="Arial"/>
-                <a:ea typeface="Arial"/>
-                <a:cs typeface="Arial"/>
-                <a:sym typeface="Arial"/>
-              </a:defRPr>
-            </a:lvl5pPr>
-            <a:lvl6pPr algn="ctr" indent="0" lvl="5" marL="0">
-              <a:spcBef>
-                <a:spcPts val="0"/>
-              </a:spcBef>
-              <a:buNone/>
-              <a:defRPr sz="700">
-                <a:solidFill>
-                  <a:schemeClr val="dk1"/>
-                </a:solidFill>
-                <a:latin typeface="Arial"/>
-                <a:ea typeface="Arial"/>
-                <a:cs typeface="Arial"/>
-                <a:sym typeface="Arial"/>
-              </a:defRPr>
-            </a:lvl6pPr>
-            <a:lvl7pPr algn="ctr" indent="0" lvl="6" marL="0">
-              <a:spcBef>
-                <a:spcPts val="0"/>
-              </a:spcBef>
-              <a:buNone/>
-              <a:defRPr sz="700">
-                <a:solidFill>
-                  <a:schemeClr val="dk1"/>
-                </a:solidFill>
-                <a:latin typeface="Arial"/>
-                <a:ea typeface="Arial"/>
-                <a:cs typeface="Arial"/>
-                <a:sym typeface="Arial"/>
-              </a:defRPr>
-            </a:lvl7pPr>
-            <a:lvl8pPr algn="ctr" indent="0" lvl="7" marL="0">
-              <a:spcBef>
-                <a:spcPts val="0"/>
-              </a:spcBef>
-              <a:buNone/>
-              <a:defRPr sz="700">
-                <a:solidFill>
-                  <a:schemeClr val="dk1"/>
-                </a:solidFill>
-                <a:latin typeface="Arial"/>
-                <a:ea typeface="Arial"/>
-                <a:cs typeface="Arial"/>
-                <a:sym typeface="Arial"/>
-              </a:defRPr>
-            </a:lvl8pPr>
-            <a:lvl9pPr algn="ctr" indent="0" lvl="8" marL="0">
-              <a:spcBef>
-                <a:spcPts val="0"/>
-              </a:spcBef>
-              <a:buNone/>
-              <a:defRPr sz="700">
-                <a:solidFill>
-                  <a:schemeClr val="dk1"/>
-                </a:solidFill>
-                <a:latin typeface="Arial"/>
-                <a:ea typeface="Arial"/>
-                <a:cs typeface="Arial"/>
-                <a:sym typeface="Arial"/>
-              </a:defRPr>
-            </a:lvl9pPr>
-          </a:lstStyle>
-          <a:p>
-            <a:pPr algn="ctr" indent="0" lvl="0" marL="0" rtl="0">
-              <a:spcBef>
-                <a:spcPts val="0"/>
-              </a:spcBef>
-              <a:spcAft>
-                <a:spcPts val="0"/>
-              </a:spcAft>
-              <a:buNone/>
-            </a:pPr>
-            <a:fld id="{00000000-1234-1234-1234-123412341234}" type="slidenum">
-              <a:rPr lang="en-US"/>
-              <a:t>‹#›</a:t>
-            </a:fld>
-            <a:endParaRPr/>
-          </a:p>
-        </p:txBody>
-      </p:sp>
-    </p:spTree>
-  </p:cSld>
-</p:sld>
-</file>
-
-<file path=ppt/slides/slide26.xml><?xml version="1.0" encoding="utf-8"?>
-<p:sld xmlns:a="http://schemas.openxmlformats.org/drawingml/2006/main" xmlns:r="http://schemas.openxmlformats.org/officeDocument/2006/relationships" xmlns:p="http://schemas.openxmlformats.org/presentationml/2006/main">
-  <p:cSld>
-    <p:spTree>
-      <p:nvGrpSpPr>
-        <p:cNvPr id="428" name="Shape 428"/>
-        <p:cNvGrpSpPr/>
-        <p:nvPr/>
-      </p:nvGrpSpPr>
-      <p:grpSpPr>
-        <a:xfrm>
-          <a:off x="0" y="0"/>
-          <a:ext cx="0" cy="0"/>
-          <a:chOff x="0" y="0"/>
-          <a:chExt cx="0" cy="0"/>
-        </a:xfrm>
-      </p:grpSpPr>
-      <p:sp>
-        <p:nvSpPr>
-          <p:cNvPr id="436" name="Google Shape;436;p31"/>
-          <p:cNvSpPr txBox="1"/>
-          <p:nvPr>
-            <p:ph type="title"/>
-          </p:nvPr>
-        </p:nvSpPr>
-        <p:spPr>
-          <a:xfrm>
-            <a:off x="771525" y="200025"/>
-            <a:ext cx="10582275" cy="790575"/>
-          </a:xfrm>
-          <a:prstGeom prst="rect">
-            <a:avLst/>
-          </a:prstGeom>
-          <a:noFill/>
-          <a:ln>
-            <a:noFill/>
-          </a:ln>
-        </p:spPr>
-        <p:txBody>
-          <a:bodyPr/>
-          <a:lstStyle/>
-          <a:p>
-            <a:pPr lvl="0" indent="0" marL="0">
-              <a:buNone/>
-            </a:pPr>
-            <a:r>
-              <a:rPr/>
-              <a:t>Backup 2 — Kiến trúc mô hình PP-OCRv5</a:t>
-            </a:r>
-          </a:p>
-        </p:txBody>
-      </p:sp>
-      <p:sp>
-        <p:nvSpPr>
-          <p:cNvPr id="437" name="Google Shape;437;p31"/>
-          <p:cNvSpPr txBox="1"/>
-          <p:nvPr>
-            <p:ph idx="2" sz="half" type="body"/>
-          </p:nvPr>
-        </p:nvSpPr>
-        <p:spPr/>
-        <p:txBody>
-          <a:bodyPr/>
-          <a:lstStyle/>
-          <a:p>
-            <a:pPr lvl="0" indent="0" marL="0">
-              <a:buNone/>
-            </a:pPr>
-            <a:r>
-              <a:rPr/>
-              <a:t>Mô hình nhận dạng ký tự siêu nhẹ chuyên biệt cho văn bản </a:t>
-            </a:r>
-            <a:r>
-              <a:rPr i="1"/>
-              <a:t>(PaddlePaddle 2025)</a:t>
-            </a:r>
-          </a:p>
-        </p:txBody>
-      </p:sp>
-      <p:graphicFrame>
-        <p:nvGraphicFramePr>
-          <p:cNvPr id="6" name="Content Placeholder 5"/>
-          <p:cNvGraphicFramePr>
-            <a:graphicFrameLocks noGrp="1"/>
-          </p:cNvGraphicFramePr>
-          <p:nvPr>
-            <p:ph idx="1"/>
-          </p:nvPr>
-        </p:nvGraphicFramePr>
-        <p:xfrm>
-          <a:off x="762000" y="2324100"/>
-          <a:ext cx="10579100" cy="3848100"/>
-        </p:xfrm>
-        <a:graphic>
-          <a:graphicData uri="http://schemas.openxmlformats.org/drawingml/2006/table">
-            <a:tbl>
-              <a:tblPr firstRow="1" bandRow="1">
-                <a:tableStyleId>{45BEF19B-5B1D-4A26-B267-ECC71EF7E2D4}</a:tableStyleId>
-              </a:tblPr>
-              <a:tblGrid>
-                <a:gridCol w="3517900"/>
-                <a:gridCol w="3517900"/>
-                <a:gridCol w="3517900"/>
-              </a:tblGrid>
-              <a:tr h="0">
-                <a:tc>
-                  <a:txBody>
-                    <a:bodyPr/>
-                    <a:lstStyle/>
-                    <a:p>
-                      <a:pPr lvl="0" indent="0" marL="0">
-                        <a:buNone/>
-                      </a:pPr>
-                      <a:r>
-                        <a:rPr/>
-                        <a:t>Thành phần</a:t>
-                      </a:r>
-                    </a:p>
-                  </a:txBody>
-                  <a:tcPr/>
-                </a:tc>
-                <a:tc>
-                  <a:txBody>
-                    <a:bodyPr/>
-                    <a:lstStyle/>
-                    <a:p>
-                      <a:pPr lvl="0" indent="0" marL="0">
-                        <a:buNone/>
-                      </a:pPr>
-                      <a:r>
-                        <a:rPr/>
-                        <a:t>Chi tiết kỹ thuật</a:t>
-                      </a:r>
-                    </a:p>
-                  </a:txBody>
-                  <a:tcPr/>
-                </a:tc>
-                <a:tc>
-                  <a:txBody>
-                    <a:bodyPr/>
-                    <a:lstStyle/>
-                    <a:p>
-                      <a:pPr lvl="0" indent="0" marL="0">
-                        <a:buNone/>
-                      </a:pPr>
-                      <a:r>
-                        <a:rPr/>
-                        <a:t>Vai trò trong hệ thống ALPR</a:t>
-                      </a:r>
-                    </a:p>
-                  </a:txBody>
-                  <a:tcPr/>
-                </a:tc>
-              </a:tr>
-              <a:tr h="0">
-                <a:tc>
-                  <a:txBody>
-                    <a:bodyPr/>
-                    <a:lstStyle/>
-                    <a:p>
-                      <a:pPr lvl="0" indent="0" marL="0">
-                        <a:buNone/>
-                      </a:pPr>
-                      <a:r>
-                        <a:rPr b="1"/>
-                        <a:t>Backbone</a:t>
-                      </a:r>
-                    </a:p>
-                  </a:txBody>
-                </a:tc>
-                <a:tc>
-                  <a:txBody>
-                    <a:bodyPr/>
-                    <a:lstStyle/>
-                    <a:p>
-                      <a:pPr lvl="0" indent="0" marL="0">
-                        <a:buNone/>
-                      </a:pPr>
-                      <a:r>
-                        <a:rPr b="1"/>
-                        <a:t>PP-LCNetV3</a:t>
-                      </a:r>
-                      <a:r>
-                        <a:rPr/>
-                        <a:t> </a:t>
-                      </a:r>
-                      <a:r>
-                        <a:rPr i="1"/>
-                        <a:t>(Lightweight CPU Net)</a:t>
-                      </a:r>
-                    </a:p>
-                  </a:txBody>
-                </a:tc>
-                <a:tc>
-                  <a:txBody>
-                    <a:bodyPr/>
-                    <a:lstStyle/>
-                    <a:p>
-                      <a:pPr lvl="0" indent="0" marL="0">
-                        <a:buNone/>
-                      </a:pPr>
-                      <a:r>
-                        <a:rPr/>
-                        <a:t>Trích xuất chuỗi đặc trưng ký tự cực nhanh trên CPU</a:t>
-                      </a:r>
-                    </a:p>
-                  </a:txBody>
-                </a:tc>
-              </a:tr>
-              <a:tr h="0">
-                <a:tc>
-                  <a:txBody>
-                    <a:bodyPr/>
-                    <a:lstStyle/>
-                    <a:p>
-                      <a:pPr lvl="0" indent="0" marL="0">
-                        <a:buNone/>
-                      </a:pPr>
-                      <a:r>
-                        <a:rPr b="1"/>
-                        <a:t>Neck</a:t>
-                      </a:r>
-                    </a:p>
-                  </a:txBody>
-                </a:tc>
-                <a:tc>
-                  <a:txBody>
-                    <a:bodyPr/>
-                    <a:lstStyle/>
-                    <a:p>
-                      <a:pPr lvl="0" indent="0" marL="0">
-                        <a:buNone/>
-                      </a:pPr>
-                      <a:r>
-                        <a:rPr b="1"/>
-                        <a:t>SVTR-HG</a:t>
-                      </a:r>
-                      <a:r>
-                        <a:rPr/>
-                        <a:t> </a:t>
-                      </a:r>
-                      <a:r>
-                        <a:rPr i="1"/>
-                        <a:t>(Gated-Attention Transformer)</a:t>
-                      </a:r>
-                    </a:p>
-                  </a:txBody>
-                </a:tc>
-                <a:tc>
-                  <a:txBody>
-                    <a:bodyPr/>
-                    <a:lstStyle/>
-                    <a:p>
-                      <a:pPr lvl="0" indent="0" marL="0">
-                        <a:buNone/>
-                      </a:pPr>
-                      <a:r>
-                        <a:rPr/>
-                        <a:t>Trích xuất thông tin ngữ cảnh chuỗi ký tự trên ảnh crop cao 64px</a:t>
-                      </a:r>
-                    </a:p>
-                  </a:txBody>
-                </a:tc>
-              </a:tr>
-              <a:tr h="0">
-                <a:tc>
-                  <a:txBody>
-                    <a:bodyPr/>
-                    <a:lstStyle/>
-                    <a:p>
-                      <a:pPr lvl="0" indent="0" marL="0">
-                        <a:buNone/>
-                      </a:pPr>
-                      <a:r>
-                        <a:rPr b="1"/>
-                        <a:t>Head &amp; Loss</a:t>
-                      </a:r>
-                    </a:p>
-                  </a:txBody>
-                </a:tc>
-                <a:tc>
-                  <a:txBody>
-                    <a:bodyPr/>
-                    <a:lstStyle/>
-                    <a:p>
-                      <a:pPr lvl="0" indent="0" marL="0">
-                        <a:buNone/>
-                      </a:pPr>
-                      <a:r>
-                        <a:rPr b="1"/>
-                        <a:t>CTC Head</a:t>
-                      </a:r>
-                      <a:r>
-                        <a:rPr/>
-                        <a:t> </a:t>
-                      </a:r>
-                      <a:r>
-                        <a:rPr i="1"/>
-                        <a:t>(Connectionist Temporal Classification)</a:t>
-                      </a:r>
-                    </a:p>
-                  </a:txBody>
-                </a:tc>
-                <a:tc>
-                  <a:txBody>
-                    <a:bodyPr/>
-                    <a:lstStyle/>
-                    <a:p>
-                      <a:pPr lvl="0" indent="0" marL="0">
-                        <a:buNone/>
-                      </a:pPr>
-                      <a:r>
-                        <a:rPr/>
-                        <a:t>Giải mã chuỗi ký tự không cần gán nhãn từng vạch đứng</a:t>
-                      </a:r>
-                    </a:p>
-                  </a:txBody>
-                </a:tc>
-              </a:tr>
-              <a:tr h="0">
-                <a:tc>
-                  <a:txBody>
-                    <a:bodyPr/>
-                    <a:lstStyle/>
-                    <a:p>
-                      <a:pPr lvl="0" indent="0" marL="0">
-                        <a:buNone/>
-                      </a:pPr>
-                      <a:r>
-                        <a:rPr b="1"/>
-                        <a:t>Quy mô</a:t>
-                      </a:r>
-                    </a:p>
-                  </a:txBody>
-                </a:tc>
-                <a:tc>
-                  <a:txBody>
-                    <a:bodyPr/>
-                    <a:lstStyle/>
-                    <a:p>
-                      <a:pPr lvl="0" indent="0" marL="0">
-                        <a:buNone/>
-                      </a:pPr>
-                      <a:r>
-                        <a:rPr b="1"/>
-                        <a:t>PP-OCRv5 Mobile</a:t>
-                      </a:r>
-                      <a:r>
-                        <a:rPr/>
-                        <a:t> · </a:t>
-                      </a:r>
-                      <a:r>
-                        <a:rPr b="1"/>
-                        <a:t>4,5 MB</a:t>
-                      </a:r>
-                    </a:p>
-                  </a:txBody>
-                </a:tc>
-                <a:tc>
-                  <a:txBody>
-                    <a:bodyPr/>
-                    <a:lstStyle/>
-                    <a:p>
-                      <a:pPr lvl="0" indent="0" marL="0">
-                        <a:buNone/>
-                      </a:pPr>
-                      <a:r>
-                        <a:rPr/>
-                        <a:t>Đạt </a:t>
-                      </a:r>
-                      <a:r>
-                        <a:rPr b="1"/>
-                        <a:t>94,83% accuracy từng ký tự</a:t>
-                      </a:r>
-                      <a:r>
-                        <a:rPr/>
-                        <a:t> trên vùng cắt biển số</a:t>
-                      </a:r>
-                    </a:p>
-                  </a:txBody>
-                </a:tc>
-              </a:tr>
-            </a:tbl>
-          </a:graphicData>
-        </a:graphic>
-      </p:graphicFrame>
-      <p:sp>
-        <p:nvSpPr>
-          <p:cNvPr id="449" name="Google Shape;449;p31"/>
-          <p:cNvSpPr txBox="1"/>
-          <p:nvPr>
-            <p:ph idx="12" type="sldNum"/>
-          </p:nvPr>
-        </p:nvSpPr>
-        <p:spPr>
-          <a:xfrm>
-            <a:off x="58380" y="6508358"/>
-            <a:ext cx="349642" cy="349642"/>
-          </a:xfrm>
-          <a:prstGeom prst="rect">
-            <a:avLst/>
-          </a:prstGeom>
-          <a:noFill/>
-          <a:ln>
-            <a:noFill/>
-          </a:ln>
-        </p:spPr>
-        <p:txBody>
-          <a:bodyPr anchor="ctr" anchorCtr="0" bIns="45700" lIns="91425" rIns="91425" spcFirstLastPara="1" tIns="45700" wrap="square">
-            <a:noAutofit/>
-          </a:bodyPr>
-          <a:lstStyle>
-            <a:lvl1pPr algn="ctr" indent="0" lvl="0" marL="0">
-              <a:spcBef>
-                <a:spcPts val="0"/>
-              </a:spcBef>
-              <a:buNone/>
-              <a:defRPr sz="700">
-                <a:solidFill>
-                  <a:schemeClr val="dk1"/>
-                </a:solidFill>
-                <a:latin typeface="Arial"/>
-                <a:ea typeface="Arial"/>
-                <a:cs typeface="Arial"/>
-                <a:sym typeface="Arial"/>
-              </a:defRPr>
-            </a:lvl1pPr>
-            <a:lvl2pPr algn="ctr" indent="0" lvl="1" marL="0">
-              <a:spcBef>
-                <a:spcPts val="0"/>
-              </a:spcBef>
-              <a:buNone/>
-              <a:defRPr sz="700">
-                <a:solidFill>
-                  <a:schemeClr val="dk1"/>
-                </a:solidFill>
-                <a:latin typeface="Arial"/>
-                <a:ea typeface="Arial"/>
-                <a:cs typeface="Arial"/>
-                <a:sym typeface="Arial"/>
-              </a:defRPr>
-            </a:lvl2pPr>
-            <a:lvl3pPr algn="ctr" indent="0" lvl="2" marL="0">
-              <a:spcBef>
-                <a:spcPts val="0"/>
-              </a:spcBef>
-              <a:buNone/>
-              <a:defRPr sz="700">
-                <a:solidFill>
-                  <a:schemeClr val="dk1"/>
-                </a:solidFill>
-                <a:latin typeface="Arial"/>
-                <a:ea typeface="Arial"/>
-                <a:cs typeface="Arial"/>
-                <a:sym typeface="Arial"/>
-              </a:defRPr>
-            </a:lvl3pPr>
-            <a:lvl4pPr algn="ctr" indent="0" lvl="3" marL="0">
-              <a:spcBef>
-                <a:spcPts val="0"/>
-              </a:spcBef>
-              <a:buNone/>
-              <a:defRPr sz="700">
-                <a:solidFill>
-                  <a:schemeClr val="dk1"/>
-                </a:solidFill>
-                <a:latin typeface="Arial"/>
-                <a:ea typeface="Arial"/>
-                <a:cs typeface="Arial"/>
-                <a:sym typeface="Arial"/>
-              </a:defRPr>
-            </a:lvl4pPr>
-            <a:lvl5pPr algn="ctr" indent="0" lvl="4" marL="0">
-              <a:spcBef>
-                <a:spcPts val="0"/>
-              </a:spcBef>
-              <a:buNone/>
-              <a:defRPr sz="700">
-                <a:solidFill>
-                  <a:schemeClr val="dk1"/>
-                </a:solidFill>
-                <a:latin typeface="Arial"/>
-                <a:ea typeface="Arial"/>
-                <a:cs typeface="Arial"/>
-                <a:sym typeface="Arial"/>
-              </a:defRPr>
-            </a:lvl5pPr>
-            <a:lvl6pPr algn="ctr" indent="0" lvl="5" marL="0">
-              <a:spcBef>
-                <a:spcPts val="0"/>
-              </a:spcBef>
-              <a:buNone/>
-              <a:defRPr sz="700">
-                <a:solidFill>
-                  <a:schemeClr val="dk1"/>
-                </a:solidFill>
-                <a:latin typeface="Arial"/>
-                <a:ea typeface="Arial"/>
-                <a:cs typeface="Arial"/>
-                <a:sym typeface="Arial"/>
-              </a:defRPr>
-            </a:lvl6pPr>
-            <a:lvl7pPr algn="ctr" indent="0" lvl="6" marL="0">
-              <a:spcBef>
-                <a:spcPts val="0"/>
-              </a:spcBef>
-              <a:buNone/>
-              <a:defRPr sz="700">
-                <a:solidFill>
-                  <a:schemeClr val="dk1"/>
-                </a:solidFill>
-                <a:latin typeface="Arial"/>
-                <a:ea typeface="Arial"/>
-                <a:cs typeface="Arial"/>
-                <a:sym typeface="Arial"/>
-              </a:defRPr>
-            </a:lvl7pPr>
-            <a:lvl8pPr algn="ctr" indent="0" lvl="7" marL="0">
-              <a:spcBef>
-                <a:spcPts val="0"/>
-              </a:spcBef>
-              <a:buNone/>
-              <a:defRPr sz="700">
-                <a:solidFill>
-                  <a:schemeClr val="dk1"/>
-                </a:solidFill>
-                <a:latin typeface="Arial"/>
-                <a:ea typeface="Arial"/>
-                <a:cs typeface="Arial"/>
-                <a:sym typeface="Arial"/>
-              </a:defRPr>
-            </a:lvl8pPr>
-            <a:lvl9pPr algn="ctr" indent="0" lvl="8" marL="0">
-              <a:spcBef>
-                <a:spcPts val="0"/>
-              </a:spcBef>
-              <a:buNone/>
-              <a:defRPr sz="700">
-                <a:solidFill>
-                  <a:schemeClr val="dk1"/>
-                </a:solidFill>
-                <a:latin typeface="Arial"/>
-                <a:ea typeface="Arial"/>
-                <a:cs typeface="Arial"/>
-                <a:sym typeface="Arial"/>
-              </a:defRPr>
-            </a:lvl9pPr>
-          </a:lstStyle>
-          <a:p>
-            <a:pPr algn="ctr" indent="0" lvl="0" marL="0" rtl="0">
-              <a:spcBef>
-                <a:spcPts val="0"/>
-              </a:spcBef>
-              <a:spcAft>
-                <a:spcPts val="0"/>
-              </a:spcAft>
-              <a:buNone/>
-            </a:pPr>
-            <a:fld id="{00000000-1234-1234-1234-123412341234}" type="slidenum">
-              <a:rPr lang="en-US"/>
-              <a:t>‹#›</a:t>
-            </a:fld>
-            <a:endParaRPr/>
-          </a:p>
-        </p:txBody>
-      </p:sp>
-    </p:spTree>
-  </p:cSld>
-</p:sld>
-</file>
-
-<file path=ppt/slides/slide27.xml><?xml version="1.0" encoding="utf-8"?>
-<p:sld xmlns:a="http://schemas.openxmlformats.org/drawingml/2006/main" xmlns:r="http://schemas.openxmlformats.org/officeDocument/2006/relationships" xmlns:p="http://schemas.openxmlformats.org/presentationml/2006/main">
-  <p:cSld>
-    <p:spTree>
-      <p:nvGrpSpPr>
-        <p:cNvPr id="428" name="Shape 428"/>
-        <p:cNvGrpSpPr/>
-        <p:nvPr/>
-      </p:nvGrpSpPr>
-      <p:grpSpPr>
-        <a:xfrm>
-          <a:off x="0" y="0"/>
-          <a:ext cx="0" cy="0"/>
-          <a:chOff x="0" y="0"/>
-          <a:chExt cx="0" cy="0"/>
-        </a:xfrm>
-      </p:grpSpPr>
-      <p:sp>
-        <p:nvSpPr>
-          <p:cNvPr id="436" name="Google Shape;436;p31"/>
-          <p:cNvSpPr txBox="1"/>
-          <p:nvPr>
-            <p:ph type="title"/>
-          </p:nvPr>
-        </p:nvSpPr>
-        <p:spPr>
-          <a:xfrm>
-            <a:off x="771525" y="200025"/>
-            <a:ext cx="10582275" cy="790575"/>
-          </a:xfrm>
-          <a:prstGeom prst="rect">
-            <a:avLst/>
-          </a:prstGeom>
-          <a:noFill/>
-          <a:ln>
-            <a:noFill/>
-          </a:ln>
-        </p:spPr>
-        <p:txBody>
-          <a:bodyPr/>
-          <a:lstStyle/>
-          <a:p>
-            <a:pPr lvl="0" indent="0" marL="0">
-              <a:buNone/>
-            </a:pPr>
-            <a:r>
-              <a:rPr/>
-              <a:t>Backup 3 — Phân tích lỗi (Error Analysis)</a:t>
+              <a:t>Backup 1 — Phân tích lỗi (Error Analysis)</a:t>
             </a:r>
           </a:p>
         </p:txBody>
@@ -53128,7 +51960,7 @@
 </p:sld>
 </file>
 
-<file path=ppt/slides/slide28.xml><?xml version="1.0" encoding="utf-8"?>
+<file path=ppt/slides/slide26.xml><?xml version="1.0" encoding="utf-8"?>
 <p:sld xmlns:a="http://schemas.openxmlformats.org/drawingml/2006/main" xmlns:r="http://schemas.openxmlformats.org/officeDocument/2006/relationships" xmlns:p="http://schemas.openxmlformats.org/presentationml/2006/main">
   <p:cSld>
     <p:spTree>
@@ -53175,7 +52007,7 @@
             </a:pPr>
             <a:r>
               <a:rPr/>
-              <a:t>Backup 4 — Bóc tách đóng góp (Ablation)</a:t>
+              <a:t>Backup 2 — Bóc tách đóng góp (Ablation)</a:t>
             </a:r>
           </a:p>
         </p:txBody>
@@ -53726,1692 +52558,7 @@
 </p:sld>
 </file>
 
-<file path=ppt/slides/slide29.xml><?xml version="1.0" encoding="utf-8"?>
-<p:sld xmlns:a="http://schemas.openxmlformats.org/drawingml/2006/main" xmlns:r="http://schemas.openxmlformats.org/officeDocument/2006/relationships" xmlns:p="http://schemas.openxmlformats.org/presentationml/2006/main">
-  <p:cSld>
-    <p:spTree>
-      <p:nvGrpSpPr>
-        <p:cNvPr id="428" name="Shape 428"/>
-        <p:cNvGrpSpPr/>
-        <p:nvPr/>
-      </p:nvGrpSpPr>
-      <p:grpSpPr>
-        <a:xfrm>
-          <a:off x="0" y="0"/>
-          <a:ext cx="0" cy="0"/>
-          <a:chOff x="0" y="0"/>
-          <a:chExt cx="0" cy="0"/>
-        </a:xfrm>
-      </p:grpSpPr>
-      <p:sp>
-        <p:nvSpPr>
-          <p:cNvPr id="436" name="Google Shape;436;p31"/>
-          <p:cNvSpPr txBox="1"/>
-          <p:nvPr>
-            <p:ph type="title"/>
-          </p:nvPr>
-        </p:nvSpPr>
-        <p:spPr>
-          <a:xfrm>
-            <a:off x="771525" y="200025"/>
-            <a:ext cx="10582275" cy="790575"/>
-          </a:xfrm>
-          <a:prstGeom prst="rect">
-            <a:avLst/>
-          </a:prstGeom>
-          <a:noFill/>
-          <a:ln>
-            <a:noFill/>
-          </a:ln>
-        </p:spPr>
-        <p:txBody>
-          <a:bodyPr/>
-          <a:lstStyle/>
-          <a:p>
-            <a:pPr lvl="0" indent="0" marL="0">
-              <a:buNone/>
-            </a:pPr>
-            <a:r>
-              <a:rPr/>
-              <a:t>Backup 5 — Siêu tham số và huấn luyện</a:t>
-            </a:r>
-          </a:p>
-        </p:txBody>
-      </p:sp>
-      <p:sp>
-        <p:nvSpPr>
-          <p:cNvPr id="437" name="Google Shape;437;p31"/>
-          <p:cNvSpPr txBox="1"/>
-          <p:nvPr>
-            <p:ph idx="2" sz="half" type="body"/>
-          </p:nvPr>
-        </p:nvSpPr>
-        <p:spPr/>
-        <p:txBody>
-          <a:bodyPr/>
-          <a:lstStyle/>
-          <a:p>
-            <a:pPr lvl="0" indent="0" marL="0">
-              <a:buNone/>
-            </a:pPr>
-            <a:r>
-              <a:rPr/>
-              <a:t>Trích </a:t>
-            </a:r>
-            <a:r>
-              <a:rPr>
-                <a:latin typeface="Courier"/>
-              </a:rPr>
-              <a:t>runs/final-640-v3/args.yaml</a:t>
-            </a:r>
-            <a:r>
-              <a:rPr/>
-              <a:t> và </a:t>
-            </a:r>
-            <a:r>
-              <a:rPr>
-                <a:latin typeface="Courier"/>
-              </a:rPr>
-              <a:t>results.csv</a:t>
-            </a:r>
-            <a:r>
-              <a:rPr/>
-              <a:t> — bản ghi </a:t>
-            </a:r>
-            <a:r>
-              <a:rPr i="1"/>
-              <a:t>đã thực thi</a:t>
-            </a:r>
-            <a:r>
-              <a:rPr/>
-              <a:t>, không phải dự định.</a:t>
-            </a:r>
-          </a:p>
-        </p:txBody>
-      </p:sp>
-      <p:graphicFrame>
-        <p:nvGraphicFramePr>
-          <p:cNvPr id="6" name="Content Placeholder 5"/>
-          <p:cNvGraphicFramePr>
-            <a:graphicFrameLocks noGrp="1"/>
-          </p:cNvGraphicFramePr>
-          <p:nvPr>
-            <p:ph idx="1"/>
-          </p:nvPr>
-        </p:nvGraphicFramePr>
-        <p:xfrm>
-          <a:off x="762000" y="2324100"/>
-          <a:ext cx="10579100" cy="3848100"/>
-        </p:xfrm>
-        <a:graphic>
-          <a:graphicData uri="http://schemas.openxmlformats.org/drawingml/2006/table">
-            <a:tbl>
-              <a:tblPr firstRow="1" bandRow="1">
-                <a:tableStyleId>{45BEF19B-5B1D-4A26-B267-ECC71EF7E2D4}</a:tableStyleId>
-              </a:tblPr>
-              <a:tblGrid>
-                <a:gridCol w="2641600"/>
-                <a:gridCol w="2641600"/>
-                <a:gridCol w="2641600"/>
-                <a:gridCol w="2641600"/>
-              </a:tblGrid>
-              <a:tr h="0">
-                <a:tc>
-                  <a:txBody>
-                    <a:bodyPr/>
-                    <a:lstStyle/>
-                    <a:p>
-                      <a:pPr lvl="0" indent="0" marL="0">
-                        <a:buNone/>
-                      </a:pPr>
-                      <a:r>
-                        <a:rPr/>
-                        <a:t>Siêu tham số</a:t>
-                      </a:r>
-                    </a:p>
-                  </a:txBody>
-                  <a:tcPr/>
-                </a:tc>
-                <a:tc>
-                  <a:txBody>
-                    <a:bodyPr/>
-                    <a:lstStyle/>
-                    <a:p>
-                      <a:pPr lvl="0" indent="0" marL="0" algn="r">
-                        <a:buNone/>
-                      </a:pPr>
-                      <a:r>
-                        <a:rPr/>
-                        <a:t>Giá trị</a:t>
-                      </a:r>
-                    </a:p>
-                  </a:txBody>
-                  <a:tcPr/>
-                </a:tc>
-                <a:tc>
-                  <a:txBody>
-                    <a:bodyPr/>
-                    <a:lstStyle/>
-                    <a:p>
-                      <a:pPr lvl="0" indent="0" marL="0">
-                        <a:buNone/>
-                      </a:pPr>
-                      <a:r>
-                        <a:rPr/>
-                        <a:t>Hàm mất mát</a:t>
-                      </a:r>
-                    </a:p>
-                  </a:txBody>
-                  <a:tcPr/>
-                </a:tc>
-                <a:tc>
-                  <a:txBody>
-                    <a:bodyPr/>
-                    <a:lstStyle/>
-                    <a:p>
-                      <a:pPr lvl="0" indent="0" marL="0" algn="r">
-                        <a:buNone/>
-                      </a:pPr>
-                      <a:r>
-                        <a:rPr/>
-                        <a:t>Epoch 1 → 20</a:t>
-                      </a:r>
-                    </a:p>
-                  </a:txBody>
-                  <a:tcPr/>
-                </a:tc>
-              </a:tr>
-              <a:tr h="0">
-                <a:tc>
-                  <a:txBody>
-                    <a:bodyPr/>
-                    <a:lstStyle/>
-                    <a:p>
-                      <a:pPr lvl="0" indent="0" marL="0">
-                        <a:buNone/>
-                      </a:pPr>
-                      <a:r>
-                        <a:rPr b="1">
-                          <a:latin typeface="Courier"/>
-                        </a:rPr>
-                        <a:t>imgsz</a:t>
-                      </a:r>
-                      <a:r>
-                        <a:rPr b="1"/>
-                        <a:t> / </a:t>
-                      </a:r>
-                      <a:r>
-                        <a:rPr b="1">
-                          <a:latin typeface="Courier"/>
-                        </a:rPr>
-                        <a:t>epochs</a:t>
-                      </a:r>
-                    </a:p>
-                  </a:txBody>
-                </a:tc>
-                <a:tc>
-                  <a:txBody>
-                    <a:bodyPr/>
-                    <a:lstStyle/>
-                    <a:p>
-                      <a:pPr lvl="0" indent="0" marL="0" algn="r">
-                        <a:buNone/>
-                      </a:pPr>
-                      <a:r>
-                        <a:rPr b="1"/>
-                        <a:t>640 px</a:t>
-                      </a:r>
-                      <a:r>
-                        <a:rPr/>
-                        <a:t> / </a:t>
-                      </a:r>
-                      <a:r>
-                        <a:rPr b="1"/>
-                        <a:t>20</a:t>
-                      </a:r>
-                    </a:p>
-                  </a:txBody>
-                </a:tc>
-                <a:tc>
-                  <a:txBody>
-                    <a:bodyPr/>
-                    <a:lstStyle/>
-                    <a:p>
-                      <a:pPr lvl="0" indent="0" marL="0">
-                        <a:buNone/>
-                      </a:pPr>
-                      <a:r>
-                        <a:rPr>
-                          <a:latin typeface="Courier"/>
-                        </a:rPr>
-                        <a:t>box_loss</a:t>
-                      </a:r>
-                    </a:p>
-                  </a:txBody>
-                </a:tc>
-                <a:tc>
-                  <a:txBody>
-                    <a:bodyPr/>
-                    <a:lstStyle/>
-                    <a:p>
-                      <a:pPr lvl="0" indent="0" marL="0" algn="r">
-                        <a:buNone/>
-                      </a:pPr>
-                      <a:r>
-                        <a:rPr b="1"/>
-                        <a:t>1,252 → 0,809</a:t>
-                      </a:r>
-                    </a:p>
-                  </a:txBody>
-                </a:tc>
-              </a:tr>
-              <a:tr h="0">
-                <a:tc>
-                  <a:txBody>
-                    <a:bodyPr/>
-                    <a:lstStyle/>
-                    <a:p>
-                      <a:pPr lvl="0" indent="0" marL="0">
-                        <a:buNone/>
-                      </a:pPr>
-                      <a:r>
-                        <a:rPr b="1">
-                          <a:latin typeface="Courier"/>
-                        </a:rPr>
-                        <a:t>batch</a:t>
-                      </a:r>
-                      <a:r>
-                        <a:rPr b="1"/>
-                        <a:t> / </a:t>
-                      </a:r>
-                      <a:r>
-                        <a:rPr b="1">
-                          <a:latin typeface="Courier"/>
-                        </a:rPr>
-                        <a:t>seed</a:t>
-                      </a:r>
-                    </a:p>
-                  </a:txBody>
-                </a:tc>
-                <a:tc>
-                  <a:txBody>
-                    <a:bodyPr/>
-                    <a:lstStyle/>
-                    <a:p>
-                      <a:pPr lvl="0" indent="0" marL="0" algn="r">
-                        <a:buNone/>
-                      </a:pPr>
-                      <a:r>
-                        <a:rPr b="1"/>
-                        <a:t>8</a:t>
-                      </a:r>
-                      <a:r>
-                        <a:rPr/>
-                        <a:t> / </a:t>
-                      </a:r>
-                      <a:r>
-                        <a:rPr b="1"/>
-                        <a:t>42</a:t>
-                      </a:r>
-                    </a:p>
-                  </a:txBody>
-                </a:tc>
-                <a:tc>
-                  <a:txBody>
-                    <a:bodyPr/>
-                    <a:lstStyle/>
-                    <a:p>
-                      <a:pPr lvl="0" indent="0" marL="0">
-                        <a:buNone/>
-                      </a:pPr>
-                      <a:r>
-                        <a:rPr>
-                          <a:latin typeface="Courier"/>
-                        </a:rPr>
-                        <a:t>cls_loss</a:t>
-                      </a:r>
-                    </a:p>
-                  </a:txBody>
-                </a:tc>
-                <a:tc>
-                  <a:txBody>
-                    <a:bodyPr/>
-                    <a:lstStyle/>
-                    <a:p>
-                      <a:pPr lvl="0" indent="0" marL="0" algn="r">
-                        <a:buNone/>
-                      </a:pPr>
-                      <a:r>
-                        <a:rPr b="1"/>
-                        <a:t>0,833 → 0,313</a:t>
-                      </a:r>
-                    </a:p>
-                  </a:txBody>
-                </a:tc>
-              </a:tr>
-              <a:tr h="0">
-                <a:tc>
-                  <a:txBody>
-                    <a:bodyPr/>
-                    <a:lstStyle/>
-                    <a:p>
-                      <a:pPr lvl="0" indent="0" marL="0">
-                        <a:buNone/>
-                      </a:pPr>
-                      <a:r>
-                        <a:rPr b="1">
-                          <a:latin typeface="Courier"/>
-                        </a:rPr>
-                        <a:t>optimizer</a:t>
-                      </a:r>
-                      <a:r>
-                        <a:rPr b="1"/>
-                        <a:t> / </a:t>
-                      </a:r>
-                      <a:r>
-                        <a:rPr b="1">
-                          <a:latin typeface="Courier"/>
-                        </a:rPr>
-                        <a:t>lr0</a:t>
-                      </a:r>
-                    </a:p>
-                  </a:txBody>
-                </a:tc>
-                <a:tc>
-                  <a:txBody>
-                    <a:bodyPr/>
-                    <a:lstStyle/>
-                    <a:p>
-                      <a:pPr lvl="0" indent="0" marL="0" algn="r">
-                        <a:buNone/>
-                      </a:pPr>
-                      <a:r>
-                        <a:rPr b="1"/>
-                        <a:t>AdamW</a:t>
-                      </a:r>
-                      <a:r>
-                        <a:rPr/>
-                        <a:t> / </a:t>
-                      </a:r>
-                      <a:r>
-                        <a:rPr b="1"/>
-                        <a:t>0,001</a:t>
-                      </a:r>
-                    </a:p>
-                  </a:txBody>
-                </a:tc>
-                <a:tc>
-                  <a:txBody>
-                    <a:bodyPr/>
-                    <a:lstStyle/>
-                    <a:p>
-                      <a:pPr lvl="0" indent="0" marL="0">
-                        <a:buNone/>
-                      </a:pPr>
-                      <a:r>
-                        <a:rPr>
-                          <a:latin typeface="Courier"/>
-                        </a:rPr>
-                        <a:t>dfl_loss</a:t>
-                      </a:r>
-                    </a:p>
-                  </a:txBody>
-                </a:tc>
-                <a:tc>
-                  <a:txBody>
-                    <a:bodyPr/>
-                    <a:lstStyle/>
-                    <a:p>
-                      <a:pPr lvl="0" indent="0" marL="0" algn="r">
-                        <a:buNone/>
-                      </a:pPr>
-                      <a:r>
-                        <a:rPr b="1"/>
-                        <a:t>1,154 → 0,987</a:t>
-                      </a:r>
-                    </a:p>
-                  </a:txBody>
-                </a:tc>
-              </a:tr>
-              <a:tr h="0">
-                <a:tc>
-                  <a:txBody>
-                    <a:bodyPr/>
-                    <a:lstStyle/>
-                    <a:p>
-                      <a:pPr lvl="0" indent="0" marL="0">
-                        <a:buNone/>
-                      </a:pPr>
-                      <a:r>
-                        <a:rPr b="1">
-                          <a:latin typeface="Courier"/>
-                        </a:rPr>
-                        <a:t>device</a:t>
-                      </a:r>
-                      <a:r>
-                        <a:rPr b="1"/>
-                        <a:t> / tham số mô hình</a:t>
-                      </a:r>
-                    </a:p>
-                  </a:txBody>
-                </a:tc>
-                <a:tc>
-                  <a:txBody>
-                    <a:bodyPr/>
-                    <a:lstStyle/>
-                    <a:p>
-                      <a:pPr lvl="0" indent="0" marL="0" algn="r">
-                        <a:buNone/>
-                      </a:pPr>
-                      <a:r>
-                        <a:rPr b="1"/>
-                        <a:t>cpu</a:t>
-                      </a:r>
-                      <a:r>
-                        <a:rPr/>
-                        <a:t> / </a:t>
-                      </a:r>
-                      <a:r>
-                        <a:rPr b="1"/>
-                        <a:t>2.590.035</a:t>
-                      </a:r>
-                    </a:p>
-                  </a:txBody>
-                </a:tc>
-                <a:tc>
-                  <a:txBody>
-                    <a:bodyPr/>
-                    <a:lstStyle/>
-                    <a:p>
-                      <a:pPr lvl="0" indent="0" marL="0">
-                        <a:buNone/>
-                      </a:pPr>
-                      <a:r>
-                        <a:rPr b="1">
-                          <a:hlinkClick r:id="rId2"/>
-                        </a:rPr>
-                        <a:t>mAP@0.5</a:t>
-                      </a:r>
-                    </a:p>
-                  </a:txBody>
-                </a:tc>
-                <a:tc>
-                  <a:txBody>
-                    <a:bodyPr/>
-                    <a:lstStyle/>
-                    <a:p>
-                      <a:pPr lvl="0" indent="0" marL="0" algn="r">
-                        <a:buNone/>
-                      </a:pPr>
-                      <a:r>
-                        <a:rPr b="1"/>
-                        <a:t>0,9684 → 0,9830</a:t>
-                      </a:r>
-                    </a:p>
-                  </a:txBody>
-                </a:tc>
-              </a:tr>
-              <a:tr h="0">
-                <a:tc>
-                  <a:txBody>
-                    <a:bodyPr/>
-                    <a:lstStyle/>
-                    <a:p>
-                      <a:pPr lvl="0" indent="0" marL="0">
-                        <a:buNone/>
-                      </a:pPr>
-                      <a:r>
-                        <a:rPr b="1"/>
-                        <a:t>Thời gian huấn luyện</a:t>
-                      </a:r>
-                    </a:p>
-                  </a:txBody>
-                </a:tc>
-                <a:tc>
-                  <a:txBody>
-                    <a:bodyPr/>
-                    <a:lstStyle/>
-                    <a:p>
-                      <a:pPr lvl="0" indent="0" marL="0" algn="r">
-                        <a:buNone/>
-                      </a:pPr>
-                      <a:r>
-                        <a:rPr b="1"/>
-                        <a:t>10,05 giờ</a:t>
-                      </a:r>
-                      <a:r>
-                        <a:rPr/>
-                        <a:t> </a:t>
-                      </a:r>
-                      <a:r>
-                        <a:rPr i="1"/>
-                        <a:t>(30,2 phút/epoch)</a:t>
-                      </a:r>
-                    </a:p>
-                  </a:txBody>
-                </a:tc>
-                <a:tc>
-                  <a:txBody>
-                    <a:bodyPr/>
-                    <a:lstStyle/>
-                    <a:p>
-                      <a:endParaRPr/>
-                    </a:p>
-                  </a:txBody>
-                </a:tc>
-                <a:tc>
-                  <a:txBody>
-                    <a:bodyPr/>
-                    <a:lstStyle/>
-                    <a:p>
-                      <a:endParaRPr/>
-                    </a:p>
-                  </a:txBody>
-                </a:tc>
-              </a:tr>
-            </a:tbl>
-          </a:graphicData>
-        </a:graphic>
-      </p:graphicFrame>
-      <p:sp>
-        <p:nvSpPr>
-          <p:cNvPr id="449" name="Google Shape;449;p31"/>
-          <p:cNvSpPr txBox="1"/>
-          <p:nvPr>
-            <p:ph idx="12" type="sldNum"/>
-          </p:nvPr>
-        </p:nvSpPr>
-        <p:spPr>
-          <a:xfrm>
-            <a:off x="58380" y="6508358"/>
-            <a:ext cx="349642" cy="349642"/>
-          </a:xfrm>
-          <a:prstGeom prst="rect">
-            <a:avLst/>
-          </a:prstGeom>
-          <a:noFill/>
-          <a:ln>
-            <a:noFill/>
-          </a:ln>
-        </p:spPr>
-        <p:txBody>
-          <a:bodyPr anchor="ctr" anchorCtr="0" bIns="45700" lIns="91425" rIns="91425" spcFirstLastPara="1" tIns="45700" wrap="square">
-            <a:noAutofit/>
-          </a:bodyPr>
-          <a:lstStyle>
-            <a:lvl1pPr algn="ctr" indent="0" lvl="0" marL="0">
-              <a:spcBef>
-                <a:spcPts val="0"/>
-              </a:spcBef>
-              <a:buNone/>
-              <a:defRPr sz="700">
-                <a:solidFill>
-                  <a:schemeClr val="dk1"/>
-                </a:solidFill>
-                <a:latin typeface="Arial"/>
-                <a:ea typeface="Arial"/>
-                <a:cs typeface="Arial"/>
-                <a:sym typeface="Arial"/>
-              </a:defRPr>
-            </a:lvl1pPr>
-            <a:lvl2pPr algn="ctr" indent="0" lvl="1" marL="0">
-              <a:spcBef>
-                <a:spcPts val="0"/>
-              </a:spcBef>
-              <a:buNone/>
-              <a:defRPr sz="700">
-                <a:solidFill>
-                  <a:schemeClr val="dk1"/>
-                </a:solidFill>
-                <a:latin typeface="Arial"/>
-                <a:ea typeface="Arial"/>
-                <a:cs typeface="Arial"/>
-                <a:sym typeface="Arial"/>
-              </a:defRPr>
-            </a:lvl2pPr>
-            <a:lvl3pPr algn="ctr" indent="0" lvl="2" marL="0">
-              <a:spcBef>
-                <a:spcPts val="0"/>
-              </a:spcBef>
-              <a:buNone/>
-              <a:defRPr sz="700">
-                <a:solidFill>
-                  <a:schemeClr val="dk1"/>
-                </a:solidFill>
-                <a:latin typeface="Arial"/>
-                <a:ea typeface="Arial"/>
-                <a:cs typeface="Arial"/>
-                <a:sym typeface="Arial"/>
-              </a:defRPr>
-            </a:lvl3pPr>
-            <a:lvl4pPr algn="ctr" indent="0" lvl="3" marL="0">
-              <a:spcBef>
-                <a:spcPts val="0"/>
-              </a:spcBef>
-              <a:buNone/>
-              <a:defRPr sz="700">
-                <a:solidFill>
-                  <a:schemeClr val="dk1"/>
-                </a:solidFill>
-                <a:latin typeface="Arial"/>
-                <a:ea typeface="Arial"/>
-                <a:cs typeface="Arial"/>
-                <a:sym typeface="Arial"/>
-              </a:defRPr>
-            </a:lvl4pPr>
-            <a:lvl5pPr algn="ctr" indent="0" lvl="4" marL="0">
-              <a:spcBef>
-                <a:spcPts val="0"/>
-              </a:spcBef>
-              <a:buNone/>
-              <a:defRPr sz="700">
-                <a:solidFill>
-                  <a:schemeClr val="dk1"/>
-                </a:solidFill>
-                <a:latin typeface="Arial"/>
-                <a:ea typeface="Arial"/>
-                <a:cs typeface="Arial"/>
-                <a:sym typeface="Arial"/>
-              </a:defRPr>
-            </a:lvl5pPr>
-            <a:lvl6pPr algn="ctr" indent="0" lvl="5" marL="0">
-              <a:spcBef>
-                <a:spcPts val="0"/>
-              </a:spcBef>
-              <a:buNone/>
-              <a:defRPr sz="700">
-                <a:solidFill>
-                  <a:schemeClr val="dk1"/>
-                </a:solidFill>
-                <a:latin typeface="Arial"/>
-                <a:ea typeface="Arial"/>
-                <a:cs typeface="Arial"/>
-                <a:sym typeface="Arial"/>
-              </a:defRPr>
-            </a:lvl6pPr>
-            <a:lvl7pPr algn="ctr" indent="0" lvl="6" marL="0">
-              <a:spcBef>
-                <a:spcPts val="0"/>
-              </a:spcBef>
-              <a:buNone/>
-              <a:defRPr sz="700">
-                <a:solidFill>
-                  <a:schemeClr val="dk1"/>
-                </a:solidFill>
-                <a:latin typeface="Arial"/>
-                <a:ea typeface="Arial"/>
-                <a:cs typeface="Arial"/>
-                <a:sym typeface="Arial"/>
-              </a:defRPr>
-            </a:lvl7pPr>
-            <a:lvl8pPr algn="ctr" indent="0" lvl="7" marL="0">
-              <a:spcBef>
-                <a:spcPts val="0"/>
-              </a:spcBef>
-              <a:buNone/>
-              <a:defRPr sz="700">
-                <a:solidFill>
-                  <a:schemeClr val="dk1"/>
-                </a:solidFill>
-                <a:latin typeface="Arial"/>
-                <a:ea typeface="Arial"/>
-                <a:cs typeface="Arial"/>
-                <a:sym typeface="Arial"/>
-              </a:defRPr>
-            </a:lvl8pPr>
-            <a:lvl9pPr algn="ctr" indent="0" lvl="8" marL="0">
-              <a:spcBef>
-                <a:spcPts val="0"/>
-              </a:spcBef>
-              <a:buNone/>
-              <a:defRPr sz="700">
-                <a:solidFill>
-                  <a:schemeClr val="dk1"/>
-                </a:solidFill>
-                <a:latin typeface="Arial"/>
-                <a:ea typeface="Arial"/>
-                <a:cs typeface="Arial"/>
-                <a:sym typeface="Arial"/>
-              </a:defRPr>
-            </a:lvl9pPr>
-          </a:lstStyle>
-          <a:p>
-            <a:pPr algn="ctr" indent="0" lvl="0" marL="0" rtl="0">
-              <a:spcBef>
-                <a:spcPts val="0"/>
-              </a:spcBef>
-              <a:spcAft>
-                <a:spcPts val="0"/>
-              </a:spcAft>
-              <a:buNone/>
-            </a:pPr>
-            <a:fld id="{00000000-1234-1234-1234-123412341234}" type="slidenum">
-              <a:rPr lang="en-US"/>
-              <a:t>‹#›</a:t>
-            </a:fld>
-            <a:endParaRPr/>
-          </a:p>
-        </p:txBody>
-      </p:sp>
-    </p:spTree>
-  </p:cSld>
-</p:sld>
-</file>
-
-<file path=ppt/slides/slide3.xml><?xml version="1.0" encoding="utf-8"?>
-<p:sld xmlns:a="http://schemas.openxmlformats.org/drawingml/2006/main" xmlns:r="http://schemas.openxmlformats.org/officeDocument/2006/relationships" xmlns:p="http://schemas.openxmlformats.org/presentationml/2006/main">
-  <p:cSld>
-    <p:spTree>
-      <p:nvGrpSpPr>
-        <p:cNvPr id="428" name="Shape 428"/>
-        <p:cNvGrpSpPr/>
-        <p:nvPr/>
-      </p:nvGrpSpPr>
-      <p:grpSpPr>
-        <a:xfrm>
-          <a:off x="0" y="0"/>
-          <a:ext cx="0" cy="0"/>
-          <a:chOff x="0" y="0"/>
-          <a:chExt cx="0" cy="0"/>
-        </a:xfrm>
-      </p:grpSpPr>
-      <p:sp>
-        <p:nvSpPr>
-          <p:cNvPr id="436" name="Google Shape;436;p31"/>
-          <p:cNvSpPr txBox="1"/>
-          <p:nvPr>
-            <p:ph type="title"/>
-          </p:nvPr>
-        </p:nvSpPr>
-        <p:spPr>
-          <a:xfrm>
-            <a:off x="771525" y="200025"/>
-            <a:ext cx="10582275" cy="790575"/>
-          </a:xfrm>
-          <a:prstGeom prst="rect">
-            <a:avLst/>
-          </a:prstGeom>
-          <a:noFill/>
-          <a:ln>
-            <a:noFill/>
-          </a:ln>
-        </p:spPr>
-        <p:txBody>
-          <a:bodyPr/>
-          <a:lstStyle/>
-          <a:p>
-            <a:pPr lvl="0" indent="0" marL="0">
-              <a:buNone/>
-            </a:pPr>
-            <a:r>
-              <a:rPr/>
-              <a:t>Vì sao đề tài này</a:t>
-            </a:r>
-          </a:p>
-        </p:txBody>
-      </p:sp>
-      <p:sp>
-        <p:nvSpPr>
-          <p:cNvPr id="437" name="Google Shape;437;p31"/>
-          <p:cNvSpPr txBox="1"/>
-          <p:nvPr>
-            <p:ph idx="2" sz="half" type="body"/>
-          </p:nvPr>
-        </p:nvSpPr>
-        <p:spPr/>
-        <p:txBody>
-          <a:bodyPr/>
-          <a:lstStyle/>
-          <a:p>
-            <a:pPr lvl="0" indent="0" marL="0">
-              <a:buNone/>
-            </a:pPr>
-            <a:r>
-              <a:rPr b="1"/>
-              <a:t>~77 triệu xe máy</a:t>
-            </a:r>
-            <a:r>
-              <a:rPr/>
-              <a:t> — </a:t>
-            </a:r>
-            <a:r>
-              <a:rPr b="1"/>
-              <a:t>85–90%</a:t>
-            </a:r>
-            <a:r>
-              <a:rPr/>
-              <a:t> lưu lượng đường bộ Việt Nam</a:t>
-            </a:r>
-          </a:p>
-          <a:p>
-            <a:pPr lvl="0" indent="0" marL="0">
-              <a:buNone/>
-            </a:pPr>
-            <a:r>
-              <a:rPr/>
-              <a:t>Cùng hệ thống, cùng phép đo: </a:t>
-            </a:r>
-            <a:r>
-              <a:rPr b="1"/>
-              <a:t>chênh 48,6 điểm</a:t>
-            </a:r>
-            <a:r>
-              <a:rPr/>
-              <a:t> </a:t>
-            </a:r>
-            <a:r>
-              <a:rPr i="1"/>
-              <a:t>(số liệu Brazil)</a:t>
-            </a:r>
-          </a:p>
-        </p:txBody>
-      </p:sp>
-      <p:pic>
-        <p:nvPicPr>
-          <p:cNvPr descr="figures/fig-gap.png" id="0" name="Picture 1"/>
-          <p:cNvPicPr>
-            <a:picLocks noGrp="1" noChangeAspect="1"/>
-          </p:cNvPicPr>
-          <p:nvPr/>
-        </p:nvPicPr>
-        <p:blipFill>
-          <a:blip r:embed="rId2"/>
-          <a:stretch>
-            <a:fillRect/>
-          </a:stretch>
-        </p:blipFill>
-        <p:spPr bwMode="auto">
-          <a:xfrm>
-            <a:off x="3530600" y="2324100"/>
-            <a:ext cx="5029200" cy="3848100"/>
-          </a:xfrm>
-          <a:prstGeom prst="rect">
-            <a:avLst/>
-          </a:prstGeom>
-          <a:noFill/>
-          <a:ln w="9525">
-            <a:noFill/>
-            <a:headEnd/>
-            <a:tailEnd/>
-          </a:ln>
-        </p:spPr>
-      </p:pic>
-      <p:sp>
-        <p:nvSpPr>
-          <p:cNvPr id="449" name="Google Shape;449;p31"/>
-          <p:cNvSpPr txBox="1"/>
-          <p:nvPr>
-            <p:ph idx="12" type="sldNum"/>
-          </p:nvPr>
-        </p:nvSpPr>
-        <p:spPr>
-          <a:xfrm>
-            <a:off x="58380" y="6508358"/>
-            <a:ext cx="349642" cy="349642"/>
-          </a:xfrm>
-          <a:prstGeom prst="rect">
-            <a:avLst/>
-          </a:prstGeom>
-          <a:noFill/>
-          <a:ln>
-            <a:noFill/>
-          </a:ln>
-        </p:spPr>
-        <p:txBody>
-          <a:bodyPr anchor="ctr" anchorCtr="0" bIns="45700" lIns="91425" rIns="91425" spcFirstLastPara="1" tIns="45700" wrap="square">
-            <a:noAutofit/>
-          </a:bodyPr>
-          <a:lstStyle>
-            <a:lvl1pPr algn="ctr" indent="0" lvl="0" marL="0">
-              <a:spcBef>
-                <a:spcPts val="0"/>
-              </a:spcBef>
-              <a:buNone/>
-              <a:defRPr sz="700">
-                <a:solidFill>
-                  <a:schemeClr val="dk1"/>
-                </a:solidFill>
-                <a:latin typeface="Arial"/>
-                <a:ea typeface="Arial"/>
-                <a:cs typeface="Arial"/>
-                <a:sym typeface="Arial"/>
-              </a:defRPr>
-            </a:lvl1pPr>
-            <a:lvl2pPr algn="ctr" indent="0" lvl="1" marL="0">
-              <a:spcBef>
-                <a:spcPts val="0"/>
-              </a:spcBef>
-              <a:buNone/>
-              <a:defRPr sz="700">
-                <a:solidFill>
-                  <a:schemeClr val="dk1"/>
-                </a:solidFill>
-                <a:latin typeface="Arial"/>
-                <a:ea typeface="Arial"/>
-                <a:cs typeface="Arial"/>
-                <a:sym typeface="Arial"/>
-              </a:defRPr>
-            </a:lvl2pPr>
-            <a:lvl3pPr algn="ctr" indent="0" lvl="2" marL="0">
-              <a:spcBef>
-                <a:spcPts val="0"/>
-              </a:spcBef>
-              <a:buNone/>
-              <a:defRPr sz="700">
-                <a:solidFill>
-                  <a:schemeClr val="dk1"/>
-                </a:solidFill>
-                <a:latin typeface="Arial"/>
-                <a:ea typeface="Arial"/>
-                <a:cs typeface="Arial"/>
-                <a:sym typeface="Arial"/>
-              </a:defRPr>
-            </a:lvl3pPr>
-            <a:lvl4pPr algn="ctr" indent="0" lvl="3" marL="0">
-              <a:spcBef>
-                <a:spcPts val="0"/>
-              </a:spcBef>
-              <a:buNone/>
-              <a:defRPr sz="700">
-                <a:solidFill>
-                  <a:schemeClr val="dk1"/>
-                </a:solidFill>
-                <a:latin typeface="Arial"/>
-                <a:ea typeface="Arial"/>
-                <a:cs typeface="Arial"/>
-                <a:sym typeface="Arial"/>
-              </a:defRPr>
-            </a:lvl4pPr>
-            <a:lvl5pPr algn="ctr" indent="0" lvl="4" marL="0">
-              <a:spcBef>
-                <a:spcPts val="0"/>
-              </a:spcBef>
-              <a:buNone/>
-              <a:defRPr sz="700">
-                <a:solidFill>
-                  <a:schemeClr val="dk1"/>
-                </a:solidFill>
-                <a:latin typeface="Arial"/>
-                <a:ea typeface="Arial"/>
-                <a:cs typeface="Arial"/>
-                <a:sym typeface="Arial"/>
-              </a:defRPr>
-            </a:lvl5pPr>
-            <a:lvl6pPr algn="ctr" indent="0" lvl="5" marL="0">
-              <a:spcBef>
-                <a:spcPts val="0"/>
-              </a:spcBef>
-              <a:buNone/>
-              <a:defRPr sz="700">
-                <a:solidFill>
-                  <a:schemeClr val="dk1"/>
-                </a:solidFill>
-                <a:latin typeface="Arial"/>
-                <a:ea typeface="Arial"/>
-                <a:cs typeface="Arial"/>
-                <a:sym typeface="Arial"/>
-              </a:defRPr>
-            </a:lvl6pPr>
-            <a:lvl7pPr algn="ctr" indent="0" lvl="6" marL="0">
-              <a:spcBef>
-                <a:spcPts val="0"/>
-              </a:spcBef>
-              <a:buNone/>
-              <a:defRPr sz="700">
-                <a:solidFill>
-                  <a:schemeClr val="dk1"/>
-                </a:solidFill>
-                <a:latin typeface="Arial"/>
-                <a:ea typeface="Arial"/>
-                <a:cs typeface="Arial"/>
-                <a:sym typeface="Arial"/>
-              </a:defRPr>
-            </a:lvl7pPr>
-            <a:lvl8pPr algn="ctr" indent="0" lvl="7" marL="0">
-              <a:spcBef>
-                <a:spcPts val="0"/>
-              </a:spcBef>
-              <a:buNone/>
-              <a:defRPr sz="700">
-                <a:solidFill>
-                  <a:schemeClr val="dk1"/>
-                </a:solidFill>
-                <a:latin typeface="Arial"/>
-                <a:ea typeface="Arial"/>
-                <a:cs typeface="Arial"/>
-                <a:sym typeface="Arial"/>
-              </a:defRPr>
-            </a:lvl8pPr>
-            <a:lvl9pPr algn="ctr" indent="0" lvl="8" marL="0">
-              <a:spcBef>
-                <a:spcPts val="0"/>
-              </a:spcBef>
-              <a:buNone/>
-              <a:defRPr sz="700">
-                <a:solidFill>
-                  <a:schemeClr val="dk1"/>
-                </a:solidFill>
-                <a:latin typeface="Arial"/>
-                <a:ea typeface="Arial"/>
-                <a:cs typeface="Arial"/>
-                <a:sym typeface="Arial"/>
-              </a:defRPr>
-            </a:lvl9pPr>
-          </a:lstStyle>
-          <a:p>
-            <a:pPr algn="ctr" indent="0" lvl="0" marL="0" rtl="0">
-              <a:spcBef>
-                <a:spcPts val="0"/>
-              </a:spcBef>
-              <a:spcAft>
-                <a:spcPts val="0"/>
-              </a:spcAft>
-              <a:buNone/>
-            </a:pPr>
-            <a:fld id="{00000000-1234-1234-1234-123412341234}" type="slidenum">
-              <a:rPr lang="en-US"/>
-              <a:t>‹#›</a:t>
-            </a:fld>
-            <a:endParaRPr/>
-          </a:p>
-        </p:txBody>
-      </p:sp>
-    </p:spTree>
-  </p:cSld>
-</p:sld>
-</file>
-
-<file path=ppt/slides/slide30.xml><?xml version="1.0" encoding="utf-8"?>
-<p:sld xmlns:a="http://schemas.openxmlformats.org/drawingml/2006/main" xmlns:r="http://schemas.openxmlformats.org/officeDocument/2006/relationships" xmlns:p="http://schemas.openxmlformats.org/presentationml/2006/main">
-  <p:cSld>
-    <p:spTree>
-      <p:nvGrpSpPr>
-        <p:cNvPr id="428" name="Shape 428"/>
-        <p:cNvGrpSpPr/>
-        <p:nvPr/>
-      </p:nvGrpSpPr>
-      <p:grpSpPr>
-        <a:xfrm>
-          <a:off x="0" y="0"/>
-          <a:ext cx="0" cy="0"/>
-          <a:chOff x="0" y="0"/>
-          <a:chExt cx="0" cy="0"/>
-        </a:xfrm>
-      </p:grpSpPr>
-      <p:sp>
-        <p:nvSpPr>
-          <p:cNvPr id="436" name="Google Shape;436;p31"/>
-          <p:cNvSpPr txBox="1"/>
-          <p:nvPr>
-            <p:ph type="title"/>
-          </p:nvPr>
-        </p:nvSpPr>
-        <p:spPr>
-          <a:xfrm>
-            <a:off x="771525" y="200025"/>
-            <a:ext cx="10582275" cy="790575"/>
-          </a:xfrm>
-          <a:prstGeom prst="rect">
-            <a:avLst/>
-          </a:prstGeom>
-          <a:noFill/>
-          <a:ln>
-            <a:noFill/>
-          </a:ln>
-        </p:spPr>
-        <p:txBody>
-          <a:bodyPr/>
-          <a:lstStyle/>
-          <a:p>
-            <a:pPr lvl="0" indent="0" marL="0">
-              <a:buNone/>
-            </a:pPr>
-            <a:r>
-              <a:rPr/>
-              <a:t>Backup 6 — Tài liệu tham khảo chính</a:t>
-            </a:r>
-          </a:p>
-        </p:txBody>
-      </p:sp>
-      <p:sp>
-        <p:nvSpPr>
-          <p:cNvPr id="437" name="Google Shape;437;p31"/>
-          <p:cNvSpPr txBox="1"/>
-          <p:nvPr>
-            <p:ph idx="2" sz="half" type="body"/>
-          </p:nvPr>
-        </p:nvSpPr>
-        <p:spPr/>
-        <p:txBody>
-          <a:bodyPr/>
-          <a:lstStyle/>
-          <a:p>
-            <a:pPr lvl="0" indent="0" marL="0">
-              <a:buNone/>
-            </a:pPr>
-            <a:r>
-              <a:rPr/>
-              <a:t>Đầy đủ </a:t>
-            </a:r>
-            <a:r>
-              <a:rPr b="1"/>
-              <a:t>232 mục</a:t>
-            </a:r>
-            <a:r>
-              <a:rPr/>
-              <a:t> trong </a:t>
-            </a:r>
-            <a:r>
-              <a:rPr>
-                <a:latin typeface="Courier"/>
-              </a:rPr>
-              <a:t>docs/references.bib</a:t>
-            </a:r>
-            <a:r>
-              <a:rPr/>
-              <a:t> — dưới đây là các nguồn chống đỡ những khẳng định chính của bài</a:t>
-            </a:r>
-          </a:p>
-        </p:txBody>
-      </p:sp>
-      <p:graphicFrame>
-        <p:nvGraphicFramePr>
-          <p:cNvPr id="6" name="Content Placeholder 5"/>
-          <p:cNvGraphicFramePr>
-            <a:graphicFrameLocks noGrp="1"/>
-          </p:cNvGraphicFramePr>
-          <p:nvPr>
-            <p:ph idx="1"/>
-          </p:nvPr>
-        </p:nvGraphicFramePr>
-        <p:xfrm>
-          <a:off x="762000" y="2324100"/>
-          <a:ext cx="10579100" cy="3848100"/>
-        </p:xfrm>
-        <a:graphic>
-          <a:graphicData uri="http://schemas.openxmlformats.org/drawingml/2006/table">
-            <a:tbl>
-              <a:tblPr firstRow="1" bandRow="1">
-                <a:tableStyleId>{45BEF19B-5B1D-4A26-B267-ECC71EF7E2D4}</a:tableStyleId>
-              </a:tblPr>
-              <a:tblGrid>
-                <a:gridCol w="5283200"/>
-                <a:gridCol w="5283200"/>
-              </a:tblGrid>
-              <a:tr h="0">
-                <a:tc>
-                  <a:txBody>
-                    <a:bodyPr/>
-                    <a:lstStyle/>
-                    <a:p>
-                      <a:pPr lvl="0" indent="0" marL="0">
-                        <a:buNone/>
-                      </a:pPr>
-                      <a:r>
-                        <a:rPr b="1"/>
-                        <a:t>Laroca</a:t>
-                      </a:r>
-                      <a:r>
-                        <a:rPr/>
-                        <a:t> và cộng sự, VISAPP </a:t>
-                      </a:r>
-                      <a:r>
-                        <a:rPr b="1"/>
-                        <a:t>2022</a:t>
-                      </a:r>
-                    </a:p>
-                  </a:txBody>
-                </a:tc>
-                <a:tc>
-                  <a:txBody>
-                    <a:bodyPr/>
-                    <a:lstStyle/>
-                    <a:p>
-                      <a:pPr lvl="0" indent="0" marL="0">
-                        <a:buNone/>
-                      </a:pPr>
-                      <a:r>
-                        <a:rPr i="1"/>
-                        <a:t>On the Cross-Dataset Generalization in License Plate Recognition</a:t>
-                      </a:r>
-                      <a:r>
-                        <a:rPr/>
-                        <a:t> — </a:t>
-                      </a:r>
-                      <a:r>
-                        <a:rPr b="1"/>
-                        <a:t>nguồn của cặp số 94,3% / 45,7%</a:t>
-                      </a:r>
-                      <a:r>
-                        <a:rPr/>
-                        <a:t>, đo trên RodoSol-ALPR của </a:t>
-                      </a:r>
-                      <a:r>
-                        <a:rPr b="1"/>
-                        <a:t>Brazil</a:t>
-                      </a:r>
-                    </a:p>
-                  </a:txBody>
-                </a:tc>
-              </a:tr>
-              <a:tr h="0">
-                <a:tc>
-                  <a:txBody>
-                    <a:bodyPr/>
-                    <a:lstStyle/>
-                    <a:p>
-                      <a:pPr lvl="0" indent="0" marL="0">
-                        <a:buNone/>
-                      </a:pPr>
-                      <a:r>
-                        <a:rPr b="1"/>
-                        <a:t>Laroca</a:t>
-                      </a:r>
-                      <a:r>
-                        <a:rPr/>
-                        <a:t> và cộng sự, IET ITS </a:t>
-                      </a:r>
-                      <a:r>
-                        <a:rPr b="1"/>
-                        <a:t>2021</a:t>
-                      </a:r>
-                    </a:p>
-                  </a:txBody>
-                </a:tc>
-                <a:tc>
-                  <a:txBody>
-                    <a:bodyPr/>
-                    <a:lstStyle/>
-                    <a:p>
-                      <a:pPr lvl="0" indent="0" marL="0">
-                        <a:buNone/>
-                      </a:pPr>
-                      <a:r>
-                        <a:rPr i="1"/>
-                        <a:t>An efficient and layout-independent ALPR system based on the YOLO detector</a:t>
-                      </a:r>
-                    </a:p>
-                  </a:txBody>
-                </a:tc>
-              </a:tr>
-              <a:tr h="0">
-                <a:tc>
-                  <a:txBody>
-                    <a:bodyPr/>
-                    <a:lstStyle/>
-                    <a:p>
-                      <a:pPr lvl="0" indent="0" marL="0">
-                        <a:buNone/>
-                      </a:pPr>
-                      <a:r>
-                        <a:rPr b="1"/>
-                        <a:t>Du</a:t>
-                      </a:r>
-                      <a:r>
-                        <a:rPr/>
-                        <a:t> và cộng sự, arXiv </a:t>
-                      </a:r>
-                      <a:r>
-                        <a:rPr b="1"/>
-                        <a:t>2020</a:t>
-                      </a:r>
-                    </a:p>
-                  </a:txBody>
-                </a:tc>
-                <a:tc>
-                  <a:txBody>
-                    <a:bodyPr/>
-                    <a:lstStyle/>
-                    <a:p>
-                      <a:pPr lvl="0" indent="0" marL="0">
-                        <a:buNone/>
-                      </a:pPr>
-                      <a:r>
-                        <a:rPr i="1"/>
-                        <a:t>PP-OCR: A Practical Ultra Lightweight OCR System</a:t>
-                      </a:r>
-                    </a:p>
-                  </a:txBody>
-                </a:tc>
-              </a:tr>
-              <a:tr h="0">
-                <a:tc>
-                  <a:txBody>
-                    <a:bodyPr/>
-                    <a:lstStyle/>
-                    <a:p>
-                      <a:pPr lvl="0" indent="0" marL="0">
-                        <a:buNone/>
-                      </a:pPr>
-                      <a:r>
-                        <a:rPr/>
-                        <a:t>PaddlePaddle Team, arXiv </a:t>
-                      </a:r>
-                      <a:r>
-                        <a:rPr b="1"/>
-                        <a:t>2025</a:t>
-                      </a:r>
-                    </a:p>
-                  </a:txBody>
-                </a:tc>
-                <a:tc>
-                  <a:txBody>
-                    <a:bodyPr/>
-                    <a:lstStyle/>
-                    <a:p>
-                      <a:pPr lvl="0" indent="0" marL="0">
-                        <a:buNone/>
-                      </a:pPr>
-                      <a:r>
-                        <a:rPr i="1"/>
-                        <a:t>PaddleOCR 3.0 Technical Report</a:t>
-                      </a:r>
-                    </a:p>
-                  </a:txBody>
-                </a:tc>
-              </a:tr>
-              <a:tr h="0">
-                <a:tc>
-                  <a:txBody>
-                    <a:bodyPr/>
-                    <a:lstStyle/>
-                    <a:p>
-                      <a:pPr lvl="0" indent="0" marL="0">
-                        <a:buNone/>
-                      </a:pPr>
-                      <a:r>
-                        <a:rPr b="1"/>
-                        <a:t>Jocher &amp; Qiu</a:t>
-                      </a:r>
-                      <a:r>
-                        <a:rPr/>
-                        <a:t>, Ultralytics </a:t>
-                      </a:r>
-                      <a:r>
-                        <a:rPr b="1"/>
-                        <a:t>2024</a:t>
-                      </a:r>
-                    </a:p>
-                  </a:txBody>
-                </a:tc>
-                <a:tc>
-                  <a:txBody>
-                    <a:bodyPr/>
-                    <a:lstStyle/>
-                    <a:p>
-                      <a:pPr lvl="0" indent="0" marL="0">
-                        <a:buNone/>
-                      </a:pPr>
-                      <a:r>
-                        <a:rPr i="1"/>
-                        <a:t>Ultralytics YOLO11</a:t>
-                      </a:r>
-                    </a:p>
-                  </a:txBody>
-                </a:tc>
-              </a:tr>
-              <a:tr h="0">
-                <a:tc>
-                  <a:txBody>
-                    <a:bodyPr/>
-                    <a:lstStyle/>
-                    <a:p>
-                      <a:pPr lvl="0" indent="0" marL="0">
-                        <a:buNone/>
-                      </a:pPr>
-                      <a:r>
-                        <a:rPr b="1"/>
-                        <a:t>TT 79/2024/TT-BCA</a:t>
-                      </a:r>
-                      <a:r>
-                        <a:rPr/>
-                        <a:t> · </a:t>
-                      </a:r>
-                      <a:r>
-                        <a:rPr b="1"/>
-                        <a:t>TT 51/2025/TT-BCA</a:t>
-                      </a:r>
-                    </a:p>
-                  </a:txBody>
-                </a:tc>
-                <a:tc>
-                  <a:txBody>
-                    <a:bodyPr/>
-                    <a:lstStyle/>
-                    <a:p>
-                      <a:pPr lvl="0" indent="0" marL="0">
-                        <a:buNone/>
-                      </a:pPr>
-                      <a:r>
-                        <a:rPr/>
-                        <a:t>Cấu trúc biển, seri, màu nền · phụ lục mã tỉnh (34 tỉnh/thành)</a:t>
-                      </a:r>
-                    </a:p>
-                  </a:txBody>
-                </a:tc>
-              </a:tr>
-              <a:tr h="0">
-                <a:tc>
-                  <a:txBody>
-                    <a:bodyPr/>
-                    <a:lstStyle/>
-                    <a:p>
-                      <a:pPr lvl="0" indent="0" marL="0">
-                        <a:buNone/>
-                      </a:pPr>
-                      <a:r>
-                        <a:rPr b="1"/>
-                        <a:t>QCVN 08:2024/BCA</a:t>
-                      </a:r>
-                    </a:p>
-                  </a:txBody>
-                </a:tc>
-                <a:tc>
-                  <a:txBody>
-                    <a:bodyPr/>
-                    <a:lstStyle/>
-                    <a:p>
-                      <a:pPr lvl="0" indent="0" marL="0">
-                        <a:buNone/>
-                      </a:pPr>
-                      <a:r>
-                        <a:rPr/>
-                        <a:t>Kích thước và tỉ lệ khung hình biển số</a:t>
-                      </a:r>
-                    </a:p>
-                  </a:txBody>
-                </a:tc>
-              </a:tr>
-            </a:tbl>
-          </a:graphicData>
-        </a:graphic>
-      </p:graphicFrame>
-      <p:sp>
-        <p:nvSpPr>
-          <p:cNvPr id="449" name="Google Shape;449;p31"/>
-          <p:cNvSpPr txBox="1"/>
-          <p:nvPr>
-            <p:ph idx="12" type="sldNum"/>
-          </p:nvPr>
-        </p:nvSpPr>
-        <p:spPr>
-          <a:xfrm>
-            <a:off x="58380" y="6508358"/>
-            <a:ext cx="349642" cy="349642"/>
-          </a:xfrm>
-          <a:prstGeom prst="rect">
-            <a:avLst/>
-          </a:prstGeom>
-          <a:noFill/>
-          <a:ln>
-            <a:noFill/>
-          </a:ln>
-        </p:spPr>
-        <p:txBody>
-          <a:bodyPr anchor="ctr" anchorCtr="0" bIns="45700" lIns="91425" rIns="91425" spcFirstLastPara="1" tIns="45700" wrap="square">
-            <a:noAutofit/>
-          </a:bodyPr>
-          <a:lstStyle>
-            <a:lvl1pPr algn="ctr" indent="0" lvl="0" marL="0">
-              <a:spcBef>
-                <a:spcPts val="0"/>
-              </a:spcBef>
-              <a:buNone/>
-              <a:defRPr sz="700">
-                <a:solidFill>
-                  <a:schemeClr val="dk1"/>
-                </a:solidFill>
-                <a:latin typeface="Arial"/>
-                <a:ea typeface="Arial"/>
-                <a:cs typeface="Arial"/>
-                <a:sym typeface="Arial"/>
-              </a:defRPr>
-            </a:lvl1pPr>
-            <a:lvl2pPr algn="ctr" indent="0" lvl="1" marL="0">
-              <a:spcBef>
-                <a:spcPts val="0"/>
-              </a:spcBef>
-              <a:buNone/>
-              <a:defRPr sz="700">
-                <a:solidFill>
-                  <a:schemeClr val="dk1"/>
-                </a:solidFill>
-                <a:latin typeface="Arial"/>
-                <a:ea typeface="Arial"/>
-                <a:cs typeface="Arial"/>
-                <a:sym typeface="Arial"/>
-              </a:defRPr>
-            </a:lvl2pPr>
-            <a:lvl3pPr algn="ctr" indent="0" lvl="2" marL="0">
-              <a:spcBef>
-                <a:spcPts val="0"/>
-              </a:spcBef>
-              <a:buNone/>
-              <a:defRPr sz="700">
-                <a:solidFill>
-                  <a:schemeClr val="dk1"/>
-                </a:solidFill>
-                <a:latin typeface="Arial"/>
-                <a:ea typeface="Arial"/>
-                <a:cs typeface="Arial"/>
-                <a:sym typeface="Arial"/>
-              </a:defRPr>
-            </a:lvl3pPr>
-            <a:lvl4pPr algn="ctr" indent="0" lvl="3" marL="0">
-              <a:spcBef>
-                <a:spcPts val="0"/>
-              </a:spcBef>
-              <a:buNone/>
-              <a:defRPr sz="700">
-                <a:solidFill>
-                  <a:schemeClr val="dk1"/>
-                </a:solidFill>
-                <a:latin typeface="Arial"/>
-                <a:ea typeface="Arial"/>
-                <a:cs typeface="Arial"/>
-                <a:sym typeface="Arial"/>
-              </a:defRPr>
-            </a:lvl4pPr>
-            <a:lvl5pPr algn="ctr" indent="0" lvl="4" marL="0">
-              <a:spcBef>
-                <a:spcPts val="0"/>
-              </a:spcBef>
-              <a:buNone/>
-              <a:defRPr sz="700">
-                <a:solidFill>
-                  <a:schemeClr val="dk1"/>
-                </a:solidFill>
-                <a:latin typeface="Arial"/>
-                <a:ea typeface="Arial"/>
-                <a:cs typeface="Arial"/>
-                <a:sym typeface="Arial"/>
-              </a:defRPr>
-            </a:lvl5pPr>
-            <a:lvl6pPr algn="ctr" indent="0" lvl="5" marL="0">
-              <a:spcBef>
-                <a:spcPts val="0"/>
-              </a:spcBef>
-              <a:buNone/>
-              <a:defRPr sz="700">
-                <a:solidFill>
-                  <a:schemeClr val="dk1"/>
-                </a:solidFill>
-                <a:latin typeface="Arial"/>
-                <a:ea typeface="Arial"/>
-                <a:cs typeface="Arial"/>
-                <a:sym typeface="Arial"/>
-              </a:defRPr>
-            </a:lvl6pPr>
-            <a:lvl7pPr algn="ctr" indent="0" lvl="6" marL="0">
-              <a:spcBef>
-                <a:spcPts val="0"/>
-              </a:spcBef>
-              <a:buNone/>
-              <a:defRPr sz="700">
-                <a:solidFill>
-                  <a:schemeClr val="dk1"/>
-                </a:solidFill>
-                <a:latin typeface="Arial"/>
-                <a:ea typeface="Arial"/>
-                <a:cs typeface="Arial"/>
-                <a:sym typeface="Arial"/>
-              </a:defRPr>
-            </a:lvl7pPr>
-            <a:lvl8pPr algn="ctr" indent="0" lvl="7" marL="0">
-              <a:spcBef>
-                <a:spcPts val="0"/>
-              </a:spcBef>
-              <a:buNone/>
-              <a:defRPr sz="700">
-                <a:solidFill>
-                  <a:schemeClr val="dk1"/>
-                </a:solidFill>
-                <a:latin typeface="Arial"/>
-                <a:ea typeface="Arial"/>
-                <a:cs typeface="Arial"/>
-                <a:sym typeface="Arial"/>
-              </a:defRPr>
-            </a:lvl8pPr>
-            <a:lvl9pPr algn="ctr" indent="0" lvl="8" marL="0">
-              <a:spcBef>
-                <a:spcPts val="0"/>
-              </a:spcBef>
-              <a:buNone/>
-              <a:defRPr sz="700">
-                <a:solidFill>
-                  <a:schemeClr val="dk1"/>
-                </a:solidFill>
-                <a:latin typeface="Arial"/>
-                <a:ea typeface="Arial"/>
-                <a:cs typeface="Arial"/>
-                <a:sym typeface="Arial"/>
-              </a:defRPr>
-            </a:lvl9pPr>
-          </a:lstStyle>
-          <a:p>
-            <a:pPr algn="ctr" indent="0" lvl="0" marL="0" rtl="0">
-              <a:spcBef>
-                <a:spcPts val="0"/>
-              </a:spcBef>
-              <a:spcAft>
-                <a:spcPts val="0"/>
-              </a:spcAft>
-              <a:buNone/>
-            </a:pPr>
-            <a:fld id="{00000000-1234-1234-1234-123412341234}" type="slidenum">
-              <a:rPr lang="en-US"/>
-              <a:t>‹#›</a:t>
-            </a:fld>
-            <a:endParaRPr/>
-          </a:p>
-        </p:txBody>
-      </p:sp>
-    </p:spTree>
-  </p:cSld>
-</p:sld>
-</file>
-
-<file path=ppt/slides/slide31.xml><?xml version="1.0" encoding="utf-8"?>
+<file path=ppt/slides/slide27.xml><?xml version="1.0" encoding="utf-8"?>
 <p:sld xmlns:a="http://schemas.openxmlformats.org/drawingml/2006/main" xmlns:r="http://schemas.openxmlformats.org/officeDocument/2006/relationships" xmlns:p="http://schemas.openxmlformats.org/presentationml/2006/main">
   <p:cSld>
     <p:spTree>
@@ -55458,7 +52605,7 @@
             </a:pPr>
             <a:r>
               <a:rPr/>
-              <a:t>Backup 7 — Tra nhanh số liệu</a:t>
+              <a:t>Backup 3 — Tra nhanh số liệu</a:t>
             </a:r>
           </a:p>
         </p:txBody>
@@ -55962,7 +53109,7 @@
 </p:sld>
 </file>
 
-<file path=ppt/slides/slide32.xml><?xml version="1.0" encoding="utf-8"?>
+<file path=ppt/slides/slide28.xml><?xml version="1.0" encoding="utf-8"?>
 <p:sld xmlns:a="http://schemas.openxmlformats.org/drawingml/2006/main" xmlns:r="http://schemas.openxmlformats.org/officeDocument/2006/relationships" xmlns:p="http://schemas.openxmlformats.org/presentationml/2006/main">
   <p:cSld>
     <p:spTree>
@@ -56009,7 +53156,7 @@
             </a:pPr>
             <a:r>
               <a:rPr/>
-              <a:t>Backup 8 — Kịch bản demo trực tiếp</a:t>
+              <a:t>Backup 4 — Kiến trúc hai mô hình: YOLO11n và PP-OCRv5 mobile</a:t>
             </a:r>
           </a:p>
         </p:txBody>
@@ -56032,7 +53179,15 @@
             </a:pPr>
             <a:r>
               <a:rPr/>
-              <a:t>Ba tình huống minh họa trên môi trường thực tế:</a:t>
+              <a:t>Bố cục một dòng hay hai dòng </a:t>
+            </a:r>
+            <a:r>
+              <a:rPr b="1"/>
+              <a:t>không do mô hình quyết</a:t>
+            </a:r>
+            <a:r>
+              <a:rPr/>
+              <a:t> — suy ra ở bước hậu xử lý theo tỉ lệ khung hình</a:t>
             </a:r>
           </a:p>
         </p:txBody>
@@ -56058,10 +53213,21 @@
                 <a:tableStyleId>{45BEF19B-5B1D-4A26-B267-ECC71EF7E2D4}</a:tableStyleId>
               </a:tblPr>
               <a:tblGrid>
-                <a:gridCol w="5283200"/>
-                <a:gridCol w="5283200"/>
+                <a:gridCol w="3517900"/>
+                <a:gridCol w="3517900"/>
+                <a:gridCol w="3517900"/>
               </a:tblGrid>
               <a:tr h="0">
+                <a:tc>
+                  <a:txBody>
+                    <a:bodyPr/>
+                    <a:lstStyle/>
+                    <a:p>
+                      <a:endParaRPr/>
+                    </a:p>
+                  </a:txBody>
+                  <a:tcPr/>
+                </a:tc>
                 <a:tc>
                   <a:txBody>
                     <a:bodyPr/>
@@ -56071,8 +53237,16 @@
                         <a:buNone/>
                       </a:pPr>
                       <a:r>
+                        <a:rPr b="1"/>
+                        <a:t>YOLO11n</a:t>
+                      </a:r>
+                      <a:r>
                         <a:rPr/>
-                        <a:t>Tình huống</a:t>
+                        <a:t> </a:t>
+                      </a:r>
+                      <a:r>
+                        <a:rPr i="1"/>
+                        <a:t>(phát hiện)</a:t>
                       </a:r>
                     </a:p>
                   </a:txBody>
@@ -56087,8 +53261,16 @@
                         <a:buNone/>
                       </a:pPr>
                       <a:r>
+                        <a:rPr b="1"/>
+                        <a:t>PP-OCRv5 mobile</a:t>
+                      </a:r>
+                      <a:r>
                         <a:rPr/>
-                        <a:t>Mục tiêu kiểm chứng</a:t>
+                        <a:t> </a:t>
+                      </a:r>
+                      <a:r>
+                        <a:rPr i="1"/>
+                        <a:t>(nhận dạng)</a:t>
                       </a:r>
                     </a:p>
                   </a:txBody>
@@ -56105,8 +53287,8 @@
                         <a:buNone/>
                       </a:pPr>
                       <a:r>
-                        <a:rPr/>
-                        <a:t>Ảnh ô tô — biển 1 dòng</a:t>
+                        <a:rPr b="1"/>
+                        <a:t>Backbone</a:t>
                       </a:r>
                     </a:p>
                   </a:txBody>
@@ -56121,7 +53303,42 @@
                       </a:pPr>
                       <a:r>
                         <a:rPr/>
-                        <a:t>Luồng cơ bản, nhận dạng chính xác dưới 1 giây</a:t>
+                        <a:t>C3k2 + </a:t>
+                      </a:r>
+                      <a:r>
+                        <a:rPr b="1"/>
+                        <a:t>C2PSA</a:t>
+                      </a:r>
+                      <a:r>
+                        <a:rPr/>
+                        <a:t> </a:t>
+                      </a:r>
+                      <a:r>
+                        <a:rPr i="1"/>
+                        <a:t>(attention)</a:t>
+                      </a:r>
+                    </a:p>
+                  </a:txBody>
+                </a:tc>
+                <a:tc>
+                  <a:txBody>
+                    <a:bodyPr/>
+                    <a:lstStyle/>
+                    <a:p>
+                      <a:pPr lvl="0" indent="0" marL="0">
+                        <a:buNone/>
+                      </a:pPr>
+                      <a:r>
+                        <a:rPr b="1"/>
+                        <a:t>PP-LCNetV3</a:t>
+                      </a:r>
+                      <a:r>
+                        <a:rPr/>
+                        <a:t> </a:t>
+                      </a:r>
+                      <a:r>
+                        <a:rPr i="1"/>
+                        <a:t>(lightweight CPU net)</a:t>
                       </a:r>
                     </a:p>
                   </a:txBody>
@@ -56137,8 +53354,8 @@
                         <a:buNone/>
                       </a:pPr>
                       <a:r>
-                        <a:rPr/>
-                        <a:t>Ảnh xe máy — biển 2 dòng</a:t>
+                        <a:rPr b="1"/>
+                        <a:t>Cơ chế đặc trưng</a:t>
                       </a:r>
                     </a:p>
                   </a:txBody>
@@ -56153,7 +53370,26 @@
                       </a:pPr>
                       <a:r>
                         <a:rPr/>
-                        <a:t>Luồng phân tách hai nửa và ghép ngang chạy thực tế</a:t>
+                        <a:t>SPPF — gộp ngữ cảnh đa tỉ lệ</a:t>
+                      </a:r>
+                    </a:p>
+                  </a:txBody>
+                </a:tc>
+                <a:tc>
+                  <a:txBody>
+                    <a:bodyPr/>
+                    <a:lstStyle/>
+                    <a:p>
+                      <a:pPr lvl="0" indent="0" marL="0">
+                        <a:buNone/>
+                      </a:pPr>
+                      <a:r>
+                        <a:rPr b="1"/>
+                        <a:t>SVTR-HG</a:t>
+                      </a:r>
+                      <a:r>
+                        <a:rPr/>
+                        <a:t> — transformer có cổng, trên dải cao 64 px</a:t>
                       </a:r>
                     </a:p>
                   </a:txBody>
@@ -56169,8 +53405,8 @@
                         <a:buNone/>
                       </a:pPr>
                       <a:r>
-                        <a:rPr/>
-                        <a:t>Video + Lịch sử</a:t>
+                        <a:rPr b="1"/>
+                        <a:t>Đầu ra</a:t>
                       </a:r>
                     </a:p>
                   </a:txBody>
@@ -56185,7 +53421,144 @@
                       </a:pPr>
                       <a:r>
                         <a:rPr/>
-                        <a:t>Xử lý bất đồng bộ, tra cứu và hiển thị lịch sử</a:t>
+                        <a:t>Anchor-free decoupled head, một lớp </a:t>
+                      </a:r>
+                      <a:r>
+                        <a:rPr>
+                          <a:latin typeface="Courier"/>
+                        </a:rPr>
+                        <a:t>license_plate</a:t>
+                      </a:r>
+                    </a:p>
+                  </a:txBody>
+                </a:tc>
+                <a:tc>
+                  <a:txBody>
+                    <a:bodyPr/>
+                    <a:lstStyle/>
+                    <a:p>
+                      <a:pPr lvl="0" indent="0" marL="0">
+                        <a:buNone/>
+                      </a:pPr>
+                      <a:r>
+                        <a:rPr b="1"/>
+                        <a:t>CTC head</a:t>
+                      </a:r>
+                      <a:r>
+                        <a:rPr/>
+                        <a:t> — giải mã chuỗi không cần nhãn từng vạch</a:t>
+                      </a:r>
+                    </a:p>
+                  </a:txBody>
+                </a:tc>
+              </a:tr>
+              <a:tr h="0">
+                <a:tc>
+                  <a:txBody>
+                    <a:bodyPr/>
+                    <a:lstStyle/>
+                    <a:p>
+                      <a:pPr lvl="0" indent="0" marL="0">
+                        <a:buNone/>
+                      </a:pPr>
+                      <a:r>
+                        <a:rPr b="1"/>
+                        <a:t>Quy mô</a:t>
+                      </a:r>
+                    </a:p>
+                  </a:txBody>
+                </a:tc>
+                <a:tc>
+                  <a:txBody>
+                    <a:bodyPr/>
+                    <a:lstStyle/>
+                    <a:p>
+                      <a:pPr lvl="0" indent="0" marL="0">
+                        <a:buNone/>
+                      </a:pPr>
+                      <a:r>
+                        <a:rPr b="1"/>
+                        <a:t>2,6M tham số</a:t>
+                      </a:r>
+                      <a:r>
+                        <a:rPr/>
+                        <a:t> · 6,5 GFLOPs</a:t>
+                      </a:r>
+                    </a:p>
+                  </a:txBody>
+                </a:tc>
+                <a:tc>
+                  <a:txBody>
+                    <a:bodyPr/>
+                    <a:lstStyle/>
+                    <a:p>
+                      <a:pPr lvl="0" indent="0" marL="0">
+                        <a:buNone/>
+                      </a:pPr>
+                      <a:r>
+                        <a:rPr b="1"/>
+                        <a:t>4,5 MB</a:t>
+                      </a:r>
+                    </a:p>
+                  </a:txBody>
+                </a:tc>
+              </a:tr>
+              <a:tr h="0">
+                <a:tc>
+                  <a:txBody>
+                    <a:bodyPr/>
+                    <a:lstStyle/>
+                    <a:p>
+                      <a:pPr lvl="0" indent="0" marL="0">
+                        <a:buNone/>
+                      </a:pPr>
+                      <a:r>
+                        <a:rPr b="1"/>
+                        <a:t>Đo được</a:t>
+                      </a:r>
+                    </a:p>
+                  </a:txBody>
+                </a:tc>
+                <a:tc>
+                  <a:txBody>
+                    <a:bodyPr/>
+                    <a:lstStyle/>
+                    <a:p>
+                      <a:pPr lvl="0" indent="0" marL="0">
+                        <a:buNone/>
+                      </a:pPr>
+                      <a:r>
+                        <a:rPr>
+                          <a:hlinkClick r:id="rId2"/>
+                        </a:rPr>
+                        <a:t>mAP@0.5</a:t>
+                      </a:r>
+                      <a:r>
+                        <a:rPr/>
+                        <a:t> = </a:t>
+                      </a:r>
+                      <a:r>
+                        <a:rPr b="1"/>
+                        <a:t>0,9829</a:t>
+                      </a:r>
+                    </a:p>
+                  </a:txBody>
+                </a:tc>
+                <a:tc>
+                  <a:txBody>
+                    <a:bodyPr/>
+                    <a:lstStyle/>
+                    <a:p>
+                      <a:pPr lvl="0" indent="0" marL="0">
+                        <a:buNone/>
+                      </a:pPr>
+                      <a:r>
+                        <a:rPr/>
+                        <a:t>1 − CER = </a:t>
+                      </a:r>
+                      <a:r>
+                        <a:rPr b="1"/>
+                        <a:t>94,83%</a:t>
                       </a:r>
                     </a:p>
                   </a:txBody>
@@ -56195,6 +53568,329 @@
           </a:graphicData>
         </a:graphic>
       </p:graphicFrame>
+      <p:sp>
+        <p:nvSpPr>
+          <p:cNvPr id="449" name="Google Shape;449;p31"/>
+          <p:cNvSpPr txBox="1"/>
+          <p:nvPr>
+            <p:ph idx="12" type="sldNum"/>
+          </p:nvPr>
+        </p:nvSpPr>
+        <p:spPr>
+          <a:xfrm>
+            <a:off x="58380" y="6508358"/>
+            <a:ext cx="349642" cy="349642"/>
+          </a:xfrm>
+          <a:prstGeom prst="rect">
+            <a:avLst/>
+          </a:prstGeom>
+          <a:noFill/>
+          <a:ln>
+            <a:noFill/>
+          </a:ln>
+        </p:spPr>
+        <p:txBody>
+          <a:bodyPr anchor="ctr" anchorCtr="0" bIns="45700" lIns="91425" rIns="91425" spcFirstLastPara="1" tIns="45700" wrap="square">
+            <a:noAutofit/>
+          </a:bodyPr>
+          <a:lstStyle>
+            <a:lvl1pPr algn="ctr" indent="0" lvl="0" marL="0">
+              <a:spcBef>
+                <a:spcPts val="0"/>
+              </a:spcBef>
+              <a:buNone/>
+              <a:defRPr sz="700">
+                <a:solidFill>
+                  <a:schemeClr val="dk1"/>
+                </a:solidFill>
+                <a:latin typeface="Arial"/>
+                <a:ea typeface="Arial"/>
+                <a:cs typeface="Arial"/>
+                <a:sym typeface="Arial"/>
+              </a:defRPr>
+            </a:lvl1pPr>
+            <a:lvl2pPr algn="ctr" indent="0" lvl="1" marL="0">
+              <a:spcBef>
+                <a:spcPts val="0"/>
+              </a:spcBef>
+              <a:buNone/>
+              <a:defRPr sz="700">
+                <a:solidFill>
+                  <a:schemeClr val="dk1"/>
+                </a:solidFill>
+                <a:latin typeface="Arial"/>
+                <a:ea typeface="Arial"/>
+                <a:cs typeface="Arial"/>
+                <a:sym typeface="Arial"/>
+              </a:defRPr>
+            </a:lvl2pPr>
+            <a:lvl3pPr algn="ctr" indent="0" lvl="2" marL="0">
+              <a:spcBef>
+                <a:spcPts val="0"/>
+              </a:spcBef>
+              <a:buNone/>
+              <a:defRPr sz="700">
+                <a:solidFill>
+                  <a:schemeClr val="dk1"/>
+                </a:solidFill>
+                <a:latin typeface="Arial"/>
+                <a:ea typeface="Arial"/>
+                <a:cs typeface="Arial"/>
+                <a:sym typeface="Arial"/>
+              </a:defRPr>
+            </a:lvl3pPr>
+            <a:lvl4pPr algn="ctr" indent="0" lvl="3" marL="0">
+              <a:spcBef>
+                <a:spcPts val="0"/>
+              </a:spcBef>
+              <a:buNone/>
+              <a:defRPr sz="700">
+                <a:solidFill>
+                  <a:schemeClr val="dk1"/>
+                </a:solidFill>
+                <a:latin typeface="Arial"/>
+                <a:ea typeface="Arial"/>
+                <a:cs typeface="Arial"/>
+                <a:sym typeface="Arial"/>
+              </a:defRPr>
+            </a:lvl4pPr>
+            <a:lvl5pPr algn="ctr" indent="0" lvl="4" marL="0">
+              <a:spcBef>
+                <a:spcPts val="0"/>
+              </a:spcBef>
+              <a:buNone/>
+              <a:defRPr sz="700">
+                <a:solidFill>
+                  <a:schemeClr val="dk1"/>
+                </a:solidFill>
+                <a:latin typeface="Arial"/>
+                <a:ea typeface="Arial"/>
+                <a:cs typeface="Arial"/>
+                <a:sym typeface="Arial"/>
+              </a:defRPr>
+            </a:lvl5pPr>
+            <a:lvl6pPr algn="ctr" indent="0" lvl="5" marL="0">
+              <a:spcBef>
+                <a:spcPts val="0"/>
+              </a:spcBef>
+              <a:buNone/>
+              <a:defRPr sz="700">
+                <a:solidFill>
+                  <a:schemeClr val="dk1"/>
+                </a:solidFill>
+                <a:latin typeface="Arial"/>
+                <a:ea typeface="Arial"/>
+                <a:cs typeface="Arial"/>
+                <a:sym typeface="Arial"/>
+              </a:defRPr>
+            </a:lvl6pPr>
+            <a:lvl7pPr algn="ctr" indent="0" lvl="6" marL="0">
+              <a:spcBef>
+                <a:spcPts val="0"/>
+              </a:spcBef>
+              <a:buNone/>
+              <a:defRPr sz="700">
+                <a:solidFill>
+                  <a:schemeClr val="dk1"/>
+                </a:solidFill>
+                <a:latin typeface="Arial"/>
+                <a:ea typeface="Arial"/>
+                <a:cs typeface="Arial"/>
+                <a:sym typeface="Arial"/>
+              </a:defRPr>
+            </a:lvl7pPr>
+            <a:lvl8pPr algn="ctr" indent="0" lvl="7" marL="0">
+              <a:spcBef>
+                <a:spcPts val="0"/>
+              </a:spcBef>
+              <a:buNone/>
+              <a:defRPr sz="700">
+                <a:solidFill>
+                  <a:schemeClr val="dk1"/>
+                </a:solidFill>
+                <a:latin typeface="Arial"/>
+                <a:ea typeface="Arial"/>
+                <a:cs typeface="Arial"/>
+                <a:sym typeface="Arial"/>
+              </a:defRPr>
+            </a:lvl8pPr>
+            <a:lvl9pPr algn="ctr" indent="0" lvl="8" marL="0">
+              <a:spcBef>
+                <a:spcPts val="0"/>
+              </a:spcBef>
+              <a:buNone/>
+              <a:defRPr sz="700">
+                <a:solidFill>
+                  <a:schemeClr val="dk1"/>
+                </a:solidFill>
+                <a:latin typeface="Arial"/>
+                <a:ea typeface="Arial"/>
+                <a:cs typeface="Arial"/>
+                <a:sym typeface="Arial"/>
+              </a:defRPr>
+            </a:lvl9pPr>
+          </a:lstStyle>
+          <a:p>
+            <a:pPr algn="ctr" indent="0" lvl="0" marL="0" rtl="0">
+              <a:spcBef>
+                <a:spcPts val="0"/>
+              </a:spcBef>
+              <a:spcAft>
+                <a:spcPts val="0"/>
+              </a:spcAft>
+              <a:buNone/>
+            </a:pPr>
+            <a:fld id="{00000000-1234-1234-1234-123412341234}" type="slidenum">
+              <a:rPr lang="en-US"/>
+              <a:t>‹#›</a:t>
+            </a:fld>
+            <a:endParaRPr/>
+          </a:p>
+        </p:txBody>
+      </p:sp>
+    </p:spTree>
+  </p:cSld>
+</p:sld>
+</file>
+
+<file path=ppt/slides/slide3.xml><?xml version="1.0" encoding="utf-8"?>
+<p:sld xmlns:a="http://schemas.openxmlformats.org/drawingml/2006/main" xmlns:r="http://schemas.openxmlformats.org/officeDocument/2006/relationships" xmlns:p="http://schemas.openxmlformats.org/presentationml/2006/main">
+  <p:cSld>
+    <p:spTree>
+      <p:nvGrpSpPr>
+        <p:cNvPr id="428" name="Shape 428"/>
+        <p:cNvGrpSpPr/>
+        <p:nvPr/>
+      </p:nvGrpSpPr>
+      <p:grpSpPr>
+        <a:xfrm>
+          <a:off x="0" y="0"/>
+          <a:ext cx="0" cy="0"/>
+          <a:chOff x="0" y="0"/>
+          <a:chExt cx="0" cy="0"/>
+        </a:xfrm>
+      </p:grpSpPr>
+      <p:sp>
+        <p:nvSpPr>
+          <p:cNvPr id="436" name="Google Shape;436;p31"/>
+          <p:cNvSpPr txBox="1"/>
+          <p:nvPr>
+            <p:ph type="title"/>
+          </p:nvPr>
+        </p:nvSpPr>
+        <p:spPr>
+          <a:xfrm>
+            <a:off x="771525" y="200025"/>
+            <a:ext cx="10582275" cy="790575"/>
+          </a:xfrm>
+          <a:prstGeom prst="rect">
+            <a:avLst/>
+          </a:prstGeom>
+          <a:noFill/>
+          <a:ln>
+            <a:noFill/>
+          </a:ln>
+        </p:spPr>
+        <p:txBody>
+          <a:bodyPr/>
+          <a:lstStyle/>
+          <a:p>
+            <a:pPr lvl="0" indent="0" marL="0">
+              <a:buNone/>
+            </a:pPr>
+            <a:r>
+              <a:rPr/>
+              <a:t>Vì sao đề tài này</a:t>
+            </a:r>
+          </a:p>
+        </p:txBody>
+      </p:sp>
+      <p:sp>
+        <p:nvSpPr>
+          <p:cNvPr id="437" name="Google Shape;437;p31"/>
+          <p:cNvSpPr txBox="1"/>
+          <p:nvPr>
+            <p:ph idx="2" sz="half" type="body"/>
+          </p:nvPr>
+        </p:nvSpPr>
+        <p:spPr/>
+        <p:txBody>
+          <a:bodyPr/>
+          <a:lstStyle/>
+          <a:p>
+            <a:pPr lvl="0" indent="0" marL="0">
+              <a:buNone/>
+            </a:pPr>
+            <a:r>
+              <a:rPr b="1"/>
+              <a:t>~77 triệu xe máy</a:t>
+            </a:r>
+            <a:r>
+              <a:rPr/>
+              <a:t> — </a:t>
+            </a:r>
+            <a:r>
+              <a:rPr b="1"/>
+              <a:t>85–90%</a:t>
+            </a:r>
+            <a:r>
+              <a:rPr/>
+              <a:t> lưu lượng đường bộ Việt Nam</a:t>
+            </a:r>
+          </a:p>
+          <a:p>
+            <a:pPr lvl="0" indent="0" marL="0">
+              <a:buNone/>
+            </a:pPr>
+            <a:r>
+              <a:rPr/>
+              <a:t>Cùng hệ thống, cùng phép đo: </a:t>
+            </a:r>
+            <a:r>
+              <a:rPr b="1"/>
+              <a:t>chênh 48,6 điểm</a:t>
+            </a:r>
+            <a:r>
+              <a:rPr/>
+              <a:t> </a:t>
+            </a:r>
+            <a:r>
+              <a:rPr i="1"/>
+              <a:t>(số liệu Brazil)</a:t>
+            </a:r>
+          </a:p>
+        </p:txBody>
+      </p:sp>
+      <p:pic>
+        <p:nvPicPr>
+          <p:cNvPr descr="figures/fig-gap.png" id="0" name="Picture 1"/>
+          <p:cNvPicPr>
+            <a:picLocks noGrp="1" noChangeAspect="1"/>
+          </p:cNvPicPr>
+          <p:nvPr/>
+        </p:nvPicPr>
+        <p:blipFill>
+          <a:blip r:embed="rId2"/>
+          <a:stretch>
+            <a:fillRect/>
+          </a:stretch>
+        </p:blipFill>
+        <p:spPr bwMode="auto">
+          <a:xfrm>
+            <a:off x="3530600" y="2324100"/>
+            <a:ext cx="5029200" cy="3848100"/>
+          </a:xfrm>
+          <a:prstGeom prst="rect">
+            <a:avLst/>
+          </a:prstGeom>
+          <a:noFill/>
+          <a:ln w="9525">
+            <a:noFill/>
+            <a:headEnd/>
+            <a:tailEnd/>
+          </a:ln>
+        </p:spPr>
+      </p:pic>
       <p:sp>
         <p:nvSpPr>
           <p:cNvPr id="449" name="Google Shape;449;p31"/>

--- a/nop/02-slide-bao-ve.pptx
+++ b/nop/02-slide-bao-ve.pptx
@@ -53528,14 +53528,8 @@
                         <a:buNone/>
                       </a:pPr>
                       <a:r>
-                        <a:rPr>
-                          <a:hlinkClick r:id="rId2"/>
-                        </a:rPr>
-                        <a:t>mAP@0.5</a:t>
-                      </a:r>
-                      <a:r>
                         <a:rPr/>
-                        <a:t> = </a:t>
+                        <a:t>mAP@0.5 = </a:t>
                       </a:r>
                       <a:r>
                         <a:rPr b="1"/>
